--- a/prompt_engineering/pe-3-structure-delimters-outputFormat-v2.pptx
+++ b/prompt_engineering/pe-3-structure-delimters-outputFormat-v2.pptx
@@ -5,7 +5,7 @@
     <p:sldMasterId id="2147483648" r:id="rId1"/>
   </p:sldMasterIdLst>
   <p:handoutMasterIdLst>
-    <p:handoutMasterId r:id="rId20"/>
+    <p:handoutMasterId r:id="rId24"/>
   </p:handoutMasterIdLst>
   <p:sldIdLst>
     <p:sldId id="257" r:id="rId2"/>
@@ -15,17 +15,21 @@
     <p:sldId id="272" r:id="rId6"/>
     <p:sldId id="273" r:id="rId7"/>
     <p:sldId id="276" r:id="rId8"/>
-    <p:sldId id="274" r:id="rId9"/>
-    <p:sldId id="275" r:id="rId10"/>
-    <p:sldId id="277" r:id="rId11"/>
-    <p:sldId id="278" r:id="rId12"/>
-    <p:sldId id="279" r:id="rId13"/>
-    <p:sldId id="280" r:id="rId14"/>
-    <p:sldId id="281" r:id="rId15"/>
-    <p:sldId id="282" r:id="rId16"/>
-    <p:sldId id="283" r:id="rId17"/>
-    <p:sldId id="289" r:id="rId18"/>
-    <p:sldId id="269" r:id="rId19"/>
+    <p:sldId id="290" r:id="rId9"/>
+    <p:sldId id="274" r:id="rId10"/>
+    <p:sldId id="275" r:id="rId11"/>
+    <p:sldId id="277" r:id="rId12"/>
+    <p:sldId id="278" r:id="rId13"/>
+    <p:sldId id="292" r:id="rId14"/>
+    <p:sldId id="291" r:id="rId15"/>
+    <p:sldId id="279" r:id="rId16"/>
+    <p:sldId id="280" r:id="rId17"/>
+    <p:sldId id="281" r:id="rId18"/>
+    <p:sldId id="282" r:id="rId19"/>
+    <p:sldId id="283" r:id="rId20"/>
+    <p:sldId id="289" r:id="rId21"/>
+    <p:sldId id="293" r:id="rId22"/>
+    <p:sldId id="269" r:id="rId23"/>
   </p:sldIdLst>
   <p:sldSz cx="12192000" cy="6858000"/>
   <p:notesSz cx="6858000" cy="9144000"/>
@@ -229,7 +233,7 @@
           <a:p>
             <a:fld id="{7BAEECA8-D063-486F-AE31-5020270C1449}" type="datetimeFigureOut">
               <a:rPr lang="en-US" smtClean="0"/>
-              <a:t>5/8/2026</a:t>
+              <a:t>6/1/2026</a:t>
             </a:fld>
             <a:endParaRPr lang="en-US"/>
           </a:p>
@@ -471,7 +475,7 @@
           <a:p>
             <a:fld id="{6383FAE1-13DE-4511-8C1B-C8AFB720664C}" type="datetimeFigureOut">
               <a:rPr lang="en-US" smtClean="0"/>
-              <a:t>5/8/2026</a:t>
+              <a:t>6/1/2026</a:t>
             </a:fld>
             <a:endParaRPr lang="en-US"/>
           </a:p>
@@ -669,7 +673,7 @@
           <a:p>
             <a:fld id="{6383FAE1-13DE-4511-8C1B-C8AFB720664C}" type="datetimeFigureOut">
               <a:rPr lang="en-US" smtClean="0"/>
-              <a:t>5/8/2026</a:t>
+              <a:t>6/1/2026</a:t>
             </a:fld>
             <a:endParaRPr lang="en-US"/>
           </a:p>
@@ -877,7 +881,7 @@
           <a:p>
             <a:fld id="{6383FAE1-13DE-4511-8C1B-C8AFB720664C}" type="datetimeFigureOut">
               <a:rPr lang="en-US" smtClean="0"/>
-              <a:t>5/8/2026</a:t>
+              <a:t>6/1/2026</a:t>
             </a:fld>
             <a:endParaRPr lang="en-US"/>
           </a:p>
@@ -1075,7 +1079,7 @@
           <a:p>
             <a:fld id="{6383FAE1-13DE-4511-8C1B-C8AFB720664C}" type="datetimeFigureOut">
               <a:rPr lang="en-US" smtClean="0"/>
-              <a:t>5/8/2026</a:t>
+              <a:t>6/1/2026</a:t>
             </a:fld>
             <a:endParaRPr lang="en-US"/>
           </a:p>
@@ -1350,7 +1354,7 @@
           <a:p>
             <a:fld id="{6383FAE1-13DE-4511-8C1B-C8AFB720664C}" type="datetimeFigureOut">
               <a:rPr lang="en-US" smtClean="0"/>
-              <a:t>5/8/2026</a:t>
+              <a:t>6/1/2026</a:t>
             </a:fld>
             <a:endParaRPr lang="en-US"/>
           </a:p>
@@ -1615,7 +1619,7 @@
           <a:p>
             <a:fld id="{6383FAE1-13DE-4511-8C1B-C8AFB720664C}" type="datetimeFigureOut">
               <a:rPr lang="en-US" smtClean="0"/>
-              <a:t>5/8/2026</a:t>
+              <a:t>6/1/2026</a:t>
             </a:fld>
             <a:endParaRPr lang="en-US"/>
           </a:p>
@@ -2027,7 +2031,7 @@
           <a:p>
             <a:fld id="{6383FAE1-13DE-4511-8C1B-C8AFB720664C}" type="datetimeFigureOut">
               <a:rPr lang="en-US" smtClean="0"/>
-              <a:t>5/8/2026</a:t>
+              <a:t>6/1/2026</a:t>
             </a:fld>
             <a:endParaRPr lang="en-US"/>
           </a:p>
@@ -2168,7 +2172,7 @@
           <a:p>
             <a:fld id="{6383FAE1-13DE-4511-8C1B-C8AFB720664C}" type="datetimeFigureOut">
               <a:rPr lang="en-US" smtClean="0"/>
-              <a:t>5/8/2026</a:t>
+              <a:t>6/1/2026</a:t>
             </a:fld>
             <a:endParaRPr lang="en-US"/>
           </a:p>
@@ -2281,7 +2285,7 @@
           <a:p>
             <a:fld id="{6383FAE1-13DE-4511-8C1B-C8AFB720664C}" type="datetimeFigureOut">
               <a:rPr lang="en-US" smtClean="0"/>
-              <a:t>5/8/2026</a:t>
+              <a:t>6/1/2026</a:t>
             </a:fld>
             <a:endParaRPr lang="en-US"/>
           </a:p>
@@ -2592,7 +2596,7 @@
           <a:p>
             <a:fld id="{6383FAE1-13DE-4511-8C1B-C8AFB720664C}" type="datetimeFigureOut">
               <a:rPr lang="en-US" smtClean="0"/>
-              <a:t>5/8/2026</a:t>
+              <a:t>6/1/2026</a:t>
             </a:fld>
             <a:endParaRPr lang="en-US"/>
           </a:p>
@@ -2883,7 +2887,7 @@
           <a:p>
             <a:fld id="{6383FAE1-13DE-4511-8C1B-C8AFB720664C}" type="datetimeFigureOut">
               <a:rPr lang="en-US" smtClean="0"/>
-              <a:t>5/8/2026</a:t>
+              <a:t>6/1/2026</a:t>
             </a:fld>
             <a:endParaRPr lang="en-US"/>
           </a:p>
@@ -3127,7 +3131,7 @@
           <a:p>
             <a:fld id="{6383FAE1-13DE-4511-8C1B-C8AFB720664C}" type="datetimeFigureOut">
               <a:rPr lang="en-US" smtClean="0"/>
-              <a:t>5/8/2026</a:t>
+              <a:t>6/1/2026</a:t>
             </a:fld>
             <a:endParaRPr lang="en-US"/>
           </a:p>
@@ -3764,6 +3768,192 @@
         <p:cNvPr id="1" name="">
           <a:extLst>
             <a:ext uri="{FF2B5EF4-FFF2-40B4-BE49-F238E27FC236}">
+              <a16:creationId xmlns:a16="http://schemas.microsoft.com/office/drawing/2014/main" id="{199E7710-6E70-9107-DA21-E5E4D4F9619B}"/>
+            </a:ext>
+          </a:extLst>
+        </p:cNvPr>
+        <p:cNvGrpSpPr/>
+        <p:nvPr/>
+      </p:nvGrpSpPr>
+      <p:grpSpPr>
+        <a:xfrm>
+          <a:off x="0" y="0"/>
+          <a:ext cx="0" cy="0"/>
+          <a:chOff x="0" y="0"/>
+          <a:chExt cx="0" cy="0"/>
+        </a:xfrm>
+      </p:grpSpPr>
+      <p:sp>
+        <p:nvSpPr>
+          <p:cNvPr id="4" name="TextBox 3">
+            <a:extLst>
+              <a:ext uri="{FF2B5EF4-FFF2-40B4-BE49-F238E27FC236}">
+                <a16:creationId xmlns:a16="http://schemas.microsoft.com/office/drawing/2014/main" id="{1FBABCEC-4C9F-CF95-52DD-87B0C24484D3}"/>
+              </a:ext>
+            </a:extLst>
+          </p:cNvPr>
+          <p:cNvSpPr txBox="1"/>
+          <p:nvPr/>
+        </p:nvSpPr>
+        <p:spPr>
+          <a:xfrm>
+            <a:off x="594360" y="962098"/>
+            <a:ext cx="10780776" cy="3046988"/>
+          </a:xfrm>
+          <a:prstGeom prst="rect">
+            <a:avLst/>
+          </a:prstGeom>
+          <a:noFill/>
+        </p:spPr>
+        <p:txBody>
+          <a:bodyPr wrap="square">
+            <a:spAutoFit/>
+          </a:bodyPr>
+          <a:lstStyle/>
+          <a:p>
+            <a:r>
+              <a:rPr lang="en-US" sz="2400" b="1" dirty="0">
+                <a:solidFill>
+                  <a:schemeClr val="accent6">
+                    <a:lumMod val="60000"/>
+                    <a:lumOff val="40000"/>
+                  </a:schemeClr>
+                </a:solidFill>
+              </a:rPr>
+              <a:t>When to Use Delimiters</a:t>
+            </a:r>
+          </a:p>
+          <a:p>
+            <a:endParaRPr lang="en-US" sz="2400" dirty="0">
+              <a:solidFill>
+                <a:schemeClr val="accent6">
+                  <a:lumMod val="60000"/>
+                  <a:lumOff val="40000"/>
+                </a:schemeClr>
+              </a:solidFill>
+            </a:endParaRPr>
+          </a:p>
+          <a:p>
+            <a:r>
+              <a:rPr lang="en-US" sz="2400" dirty="0">
+                <a:solidFill>
+                  <a:schemeClr val="accent6">
+                    <a:lumMod val="60000"/>
+                    <a:lumOff val="40000"/>
+                  </a:schemeClr>
+                </a:solidFill>
+              </a:rPr>
+              <a:t>Delimiters are especially useful when:</a:t>
+            </a:r>
+          </a:p>
+          <a:p>
+            <a:pPr marL="342900" lvl="0" indent="-342900">
+              <a:buFont typeface="Arial" panose="020B0604020202020204" pitchFamily="34" charset="0"/>
+              <a:buChar char="•"/>
+            </a:pPr>
+            <a:r>
+              <a:rPr lang="en-US" sz="2400" dirty="0">
+                <a:solidFill>
+                  <a:schemeClr val="accent6">
+                    <a:lumMod val="60000"/>
+                    <a:lumOff val="40000"/>
+                  </a:schemeClr>
+                </a:solidFill>
+              </a:rPr>
+              <a:t>Working with long text inputs</a:t>
+            </a:r>
+          </a:p>
+          <a:p>
+            <a:pPr marL="342900" lvl="0" indent="-342900">
+              <a:buFont typeface="Arial" panose="020B0604020202020204" pitchFamily="34" charset="0"/>
+              <a:buChar char="•"/>
+            </a:pPr>
+            <a:r>
+              <a:rPr lang="en-US" sz="2400" dirty="0">
+                <a:solidFill>
+                  <a:schemeClr val="accent6">
+                    <a:lumMod val="60000"/>
+                    <a:lumOff val="40000"/>
+                  </a:schemeClr>
+                </a:solidFill>
+              </a:rPr>
+              <a:t>Handling structured data</a:t>
+            </a:r>
+          </a:p>
+          <a:p>
+            <a:pPr marL="342900" lvl="0" indent="-342900">
+              <a:buFont typeface="Arial" panose="020B0604020202020204" pitchFamily="34" charset="0"/>
+              <a:buChar char="•"/>
+            </a:pPr>
+            <a:r>
+              <a:rPr lang="en-US" sz="2400" dirty="0">
+                <a:solidFill>
+                  <a:schemeClr val="accent6">
+                    <a:lumMod val="60000"/>
+                    <a:lumOff val="40000"/>
+                  </a:schemeClr>
+                </a:solidFill>
+              </a:rPr>
+              <a:t>Passing code snippets</a:t>
+            </a:r>
+          </a:p>
+          <a:p>
+            <a:pPr marL="342900" lvl="0" indent="-342900">
+              <a:buFont typeface="Arial" panose="020B0604020202020204" pitchFamily="34" charset="0"/>
+              <a:buChar char="•"/>
+            </a:pPr>
+            <a:r>
+              <a:rPr lang="en-US" sz="2400" dirty="0">
+                <a:solidFill>
+                  <a:schemeClr val="accent6">
+                    <a:lumMod val="60000"/>
+                    <a:lumOff val="40000"/>
+                  </a:schemeClr>
+                </a:solidFill>
+              </a:rPr>
+              <a:t>Providing multiple examples</a:t>
+            </a:r>
+          </a:p>
+          <a:p>
+            <a:pPr marL="342900" lvl="0" indent="-342900">
+              <a:buFont typeface="Arial" panose="020B0604020202020204" pitchFamily="34" charset="0"/>
+              <a:buChar char="•"/>
+            </a:pPr>
+            <a:r>
+              <a:rPr lang="en-US" sz="2400" dirty="0">
+                <a:solidFill>
+                  <a:schemeClr val="accent6">
+                    <a:lumMod val="60000"/>
+                    <a:lumOff val="40000"/>
+                  </a:schemeClr>
+                </a:solidFill>
+              </a:rPr>
+              <a:t>Preventing instruction mixing</a:t>
+            </a:r>
+          </a:p>
+        </p:txBody>
+      </p:sp>
+    </p:spTree>
+    <p:extLst>
+      <p:ext uri="{BB962C8B-B14F-4D97-AF65-F5344CB8AC3E}">
+        <p14:creationId xmlns:p14="http://schemas.microsoft.com/office/powerpoint/2010/main" val="2196425292"/>
+      </p:ext>
+    </p:extLst>
+  </p:cSld>
+  <p:clrMapOvr>
+    <a:masterClrMapping/>
+  </p:clrMapOvr>
+</p:sld>
+</file>
+
+<file path=ppt/slides/slide11.xml><?xml version="1.0" encoding="utf-8"?>
+<p:sld xmlns:a="http://schemas.openxmlformats.org/drawingml/2006/main" xmlns:r="http://schemas.openxmlformats.org/officeDocument/2006/relationships" xmlns:p="http://schemas.openxmlformats.org/presentationml/2006/main">
+  <p:cSld>
+    <p:spTree>
+      <p:nvGrpSpPr>
+        <p:cNvPr id="1" name="">
+          <a:extLst>
+            <a:ext uri="{FF2B5EF4-FFF2-40B4-BE49-F238E27FC236}">
               <a16:creationId xmlns:a16="http://schemas.microsoft.com/office/drawing/2014/main" id="{574D04B5-0536-12F2-9638-B13E8D367705}"/>
             </a:ext>
           </a:extLst>
@@ -4035,7 +4225,7 @@
 </p:sld>
 </file>
 
-<file path=ppt/slides/slide11.xml><?xml version="1.0" encoding="utf-8"?>
+<file path=ppt/slides/slide12.xml><?xml version="1.0" encoding="utf-8"?>
 <p:sld xmlns:a="http://schemas.openxmlformats.org/drawingml/2006/main" xmlns:r="http://schemas.openxmlformats.org/officeDocument/2006/relationships" xmlns:p="http://schemas.openxmlformats.org/presentationml/2006/main">
   <p:cSld>
     <p:spTree>
@@ -4058,130 +4248,66 @@
           <a:chExt cx="0" cy="0"/>
         </a:xfrm>
       </p:grpSpPr>
-      <p:sp>
-        <p:nvSpPr>
-          <p:cNvPr id="4" name="TextBox 3">
-            <a:extLst>
-              <a:ext uri="{FF2B5EF4-FFF2-40B4-BE49-F238E27FC236}">
-                <a16:creationId xmlns:a16="http://schemas.microsoft.com/office/drawing/2014/main" id="{BC2BF888-EAEA-B51B-73C6-FDECB4A8FF88}"/>
-              </a:ext>
-            </a:extLst>
-          </p:cNvPr>
-          <p:cNvSpPr txBox="1"/>
+      <p:pic>
+        <p:nvPicPr>
+          <p:cNvPr id="3" name="Picture 2">
+            <a:extLst>
+              <a:ext uri="{FF2B5EF4-FFF2-40B4-BE49-F238E27FC236}">
+                <a16:creationId xmlns:a16="http://schemas.microsoft.com/office/drawing/2014/main" id="{F5BE6AAB-3871-F41A-DA28-E1DFFF5A1A06}"/>
+              </a:ext>
+            </a:extLst>
+          </p:cNvPr>
+          <p:cNvPicPr>
+            <a:picLocks noChangeAspect="1"/>
+          </p:cNvPicPr>
           <p:nvPr/>
-        </p:nvSpPr>
+        </p:nvPicPr>
+        <p:blipFill>
+          <a:blip r:embed="rId2"/>
+          <a:stretch>
+            <a:fillRect/>
+          </a:stretch>
+        </p:blipFill>
         <p:spPr>
           <a:xfrm>
-            <a:off x="594360" y="962098"/>
-            <a:ext cx="10780776" cy="3046988"/>
+            <a:off x="216041" y="96569"/>
+            <a:ext cx="10223420" cy="3753055"/>
           </a:xfrm>
           <a:prstGeom prst="rect">
             <a:avLst/>
           </a:prstGeom>
-          <a:noFill/>
         </p:spPr>
-        <p:txBody>
-          <a:bodyPr wrap="square">
-            <a:spAutoFit/>
-          </a:bodyPr>
-          <a:lstStyle/>
-          <a:p>
-            <a:r>
-              <a:rPr lang="en-US" sz="2400" b="1" dirty="0">
-                <a:solidFill>
-                  <a:schemeClr val="accent6">
-                    <a:lumMod val="60000"/>
-                    <a:lumOff val="40000"/>
-                  </a:schemeClr>
-                </a:solidFill>
-              </a:rPr>
-              <a:t>Example Without Format Constraint</a:t>
-            </a:r>
-          </a:p>
-          <a:p>
-            <a:endParaRPr lang="en-US" sz="2400" dirty="0">
-              <a:solidFill>
-                <a:schemeClr val="accent6">
-                  <a:lumMod val="60000"/>
-                  <a:lumOff val="40000"/>
-                </a:schemeClr>
-              </a:solidFill>
-            </a:endParaRPr>
-          </a:p>
-          <a:p>
-            <a:r>
-              <a:rPr lang="en-US" sz="2400" dirty="0">
-                <a:solidFill>
-                  <a:schemeClr val="accent6">
-                    <a:lumMod val="60000"/>
-                    <a:lumOff val="40000"/>
-                  </a:schemeClr>
-                </a:solidFill>
-              </a:rPr>
-              <a:t>Prompt:</a:t>
-            </a:r>
-          </a:p>
-          <a:p>
-            <a:r>
-              <a:rPr lang="en-US" sz="2400" dirty="0">
-                <a:solidFill>
-                  <a:schemeClr val="accent6">
-                    <a:lumMod val="60000"/>
-                    <a:lumOff val="40000"/>
-                  </a:schemeClr>
-                </a:solidFill>
-              </a:rPr>
-              <a:t>I have uploaded a csv file. The file contains student data.</a:t>
-            </a:r>
-          </a:p>
-          <a:p>
-            <a:r>
-              <a:rPr lang="en-US" sz="2400" dirty="0">
-                <a:solidFill>
-                  <a:schemeClr val="accent6">
-                    <a:lumMod val="60000"/>
-                    <a:lumOff val="40000"/>
-                  </a:schemeClr>
-                </a:solidFill>
-              </a:rPr>
-              <a:t>Provide student information for John, Age 20, Course AI.</a:t>
-            </a:r>
-          </a:p>
-          <a:p>
-            <a:endParaRPr lang="en-US" sz="2400" dirty="0">
-              <a:solidFill>
-                <a:schemeClr val="accent6">
-                  <a:lumMod val="60000"/>
-                  <a:lumOff val="40000"/>
-                </a:schemeClr>
-              </a:solidFill>
-            </a:endParaRPr>
-          </a:p>
-          <a:p>
-            <a:endParaRPr lang="en-US" sz="2400" dirty="0">
-              <a:solidFill>
-                <a:schemeClr val="accent6">
-                  <a:lumMod val="60000"/>
-                  <a:lumOff val="40000"/>
-                </a:schemeClr>
-              </a:solidFill>
-            </a:endParaRPr>
-          </a:p>
-          <a:p>
-            <a:r>
-              <a:rPr lang="en-US" sz="2400" dirty="0">
-                <a:solidFill>
-                  <a:schemeClr val="accent6">
-                    <a:lumMod val="60000"/>
-                    <a:lumOff val="40000"/>
-                  </a:schemeClr>
-                </a:solidFill>
-              </a:rPr>
-              <a:t>AI might respond in random format.</a:t>
-            </a:r>
-          </a:p>
-        </p:txBody>
-      </p:sp>
+      </p:pic>
+      <p:pic>
+        <p:nvPicPr>
+          <p:cNvPr id="6" name="Picture 5">
+            <a:extLst>
+              <a:ext uri="{FF2B5EF4-FFF2-40B4-BE49-F238E27FC236}">
+                <a16:creationId xmlns:a16="http://schemas.microsoft.com/office/drawing/2014/main" id="{11670B2F-8F15-C4F4-BA37-9B091A966B55}"/>
+              </a:ext>
+            </a:extLst>
+          </p:cNvPr>
+          <p:cNvPicPr>
+            <a:picLocks noChangeAspect="1"/>
+          </p:cNvPicPr>
+          <p:nvPr/>
+        </p:nvPicPr>
+        <p:blipFill>
+          <a:blip r:embed="rId3"/>
+          <a:stretch>
+            <a:fillRect/>
+          </a:stretch>
+        </p:blipFill>
+        <p:spPr>
+          <a:xfrm>
+            <a:off x="2734056" y="3043016"/>
+            <a:ext cx="8482569" cy="3536937"/>
+          </a:xfrm>
+          <a:prstGeom prst="rect">
+            <a:avLst/>
+          </a:prstGeom>
+        </p:spPr>
+      </p:pic>
     </p:spTree>
     <p:extLst>
       <p:ext uri="{BB962C8B-B14F-4D97-AF65-F5344CB8AC3E}">
@@ -4195,7 +4321,233 @@
 </p:sld>
 </file>
 
-<file path=ppt/slides/slide12.xml><?xml version="1.0" encoding="utf-8"?>
+<file path=ppt/slides/slide13.xml><?xml version="1.0" encoding="utf-8"?>
+<p:sld xmlns:a="http://schemas.openxmlformats.org/drawingml/2006/main" xmlns:r="http://schemas.openxmlformats.org/officeDocument/2006/relationships" xmlns:p="http://schemas.openxmlformats.org/presentationml/2006/main">
+  <p:cSld>
+    <p:spTree>
+      <p:nvGrpSpPr>
+        <p:cNvPr id="1" name="">
+          <a:extLst>
+            <a:ext uri="{FF2B5EF4-FFF2-40B4-BE49-F238E27FC236}">
+              <a16:creationId xmlns:a16="http://schemas.microsoft.com/office/drawing/2014/main" id="{B2B7C704-F5A5-875F-7C63-CD1F4373EB99}"/>
+            </a:ext>
+          </a:extLst>
+        </p:cNvPr>
+        <p:cNvGrpSpPr/>
+        <p:nvPr/>
+      </p:nvGrpSpPr>
+      <p:grpSpPr>
+        <a:xfrm>
+          <a:off x="0" y="0"/>
+          <a:ext cx="0" cy="0"/>
+          <a:chOff x="0" y="0"/>
+          <a:chExt cx="0" cy="0"/>
+        </a:xfrm>
+      </p:grpSpPr>
+      <p:pic>
+        <p:nvPicPr>
+          <p:cNvPr id="4" name="Picture 3">
+            <a:extLst>
+              <a:ext uri="{FF2B5EF4-FFF2-40B4-BE49-F238E27FC236}">
+                <a16:creationId xmlns:a16="http://schemas.microsoft.com/office/drawing/2014/main" id="{CB367890-964B-259A-D1D7-D3853F59F84B}"/>
+              </a:ext>
+            </a:extLst>
+          </p:cNvPr>
+          <p:cNvPicPr>
+            <a:picLocks noChangeAspect="1"/>
+          </p:cNvPicPr>
+          <p:nvPr/>
+        </p:nvPicPr>
+        <p:blipFill>
+          <a:blip r:embed="rId2"/>
+          <a:stretch>
+            <a:fillRect/>
+          </a:stretch>
+        </p:blipFill>
+        <p:spPr>
+          <a:xfrm>
+            <a:off x="704088" y="647099"/>
+            <a:ext cx="9073106" cy="5563802"/>
+          </a:xfrm>
+          <a:prstGeom prst="rect">
+            <a:avLst/>
+          </a:prstGeom>
+        </p:spPr>
+      </p:pic>
+    </p:spTree>
+    <p:extLst>
+      <p:ext uri="{BB962C8B-B14F-4D97-AF65-F5344CB8AC3E}">
+        <p14:creationId xmlns:p14="http://schemas.microsoft.com/office/powerpoint/2010/main" val="3401114640"/>
+      </p:ext>
+    </p:extLst>
+  </p:cSld>
+  <p:clrMapOvr>
+    <a:masterClrMapping/>
+  </p:clrMapOvr>
+</p:sld>
+</file>
+
+<file path=ppt/slides/slide14.xml><?xml version="1.0" encoding="utf-8"?>
+<p:sld xmlns:a="http://schemas.openxmlformats.org/drawingml/2006/main" xmlns:r="http://schemas.openxmlformats.org/officeDocument/2006/relationships" xmlns:p="http://schemas.openxmlformats.org/presentationml/2006/main">
+  <p:cSld>
+    <p:spTree>
+      <p:nvGrpSpPr>
+        <p:cNvPr id="1" name="">
+          <a:extLst>
+            <a:ext uri="{FF2B5EF4-FFF2-40B4-BE49-F238E27FC236}">
+              <a16:creationId xmlns:a16="http://schemas.microsoft.com/office/drawing/2014/main" id="{8A476F89-52CF-6B8A-6A4D-F3B44A0A60F6}"/>
+            </a:ext>
+          </a:extLst>
+        </p:cNvPr>
+        <p:cNvGrpSpPr/>
+        <p:nvPr/>
+      </p:nvGrpSpPr>
+      <p:grpSpPr>
+        <a:xfrm>
+          <a:off x="0" y="0"/>
+          <a:ext cx="0" cy="0"/>
+          <a:chOff x="0" y="0"/>
+          <a:chExt cx="0" cy="0"/>
+        </a:xfrm>
+      </p:grpSpPr>
+      <p:sp>
+        <p:nvSpPr>
+          <p:cNvPr id="4" name="TextBox 3">
+            <a:extLst>
+              <a:ext uri="{FF2B5EF4-FFF2-40B4-BE49-F238E27FC236}">
+                <a16:creationId xmlns:a16="http://schemas.microsoft.com/office/drawing/2014/main" id="{E0D1EBA0-88CB-9F5B-C2AF-116C9F2E8312}"/>
+              </a:ext>
+            </a:extLst>
+          </p:cNvPr>
+          <p:cNvSpPr txBox="1"/>
+          <p:nvPr/>
+        </p:nvSpPr>
+        <p:spPr>
+          <a:xfrm>
+            <a:off x="594360" y="962098"/>
+            <a:ext cx="10780776" cy="3046988"/>
+          </a:xfrm>
+          <a:prstGeom prst="rect">
+            <a:avLst/>
+          </a:prstGeom>
+          <a:noFill/>
+        </p:spPr>
+        <p:txBody>
+          <a:bodyPr wrap="square">
+            <a:spAutoFit/>
+          </a:bodyPr>
+          <a:lstStyle/>
+          <a:p>
+            <a:r>
+              <a:rPr lang="en-US" sz="2400" b="1" dirty="0">
+                <a:solidFill>
+                  <a:schemeClr val="accent6">
+                    <a:lumMod val="60000"/>
+                    <a:lumOff val="40000"/>
+                  </a:schemeClr>
+                </a:solidFill>
+              </a:rPr>
+              <a:t>Example Without Format Constraint</a:t>
+            </a:r>
+          </a:p>
+          <a:p>
+            <a:endParaRPr lang="en-US" sz="2400" dirty="0">
+              <a:solidFill>
+                <a:schemeClr val="accent6">
+                  <a:lumMod val="60000"/>
+                  <a:lumOff val="40000"/>
+                </a:schemeClr>
+              </a:solidFill>
+            </a:endParaRPr>
+          </a:p>
+          <a:p>
+            <a:r>
+              <a:rPr lang="en-US" sz="2400" dirty="0">
+                <a:solidFill>
+                  <a:schemeClr val="accent6">
+                    <a:lumMod val="60000"/>
+                    <a:lumOff val="40000"/>
+                  </a:schemeClr>
+                </a:solidFill>
+              </a:rPr>
+              <a:t>Prompt:</a:t>
+            </a:r>
+          </a:p>
+          <a:p>
+            <a:r>
+              <a:rPr lang="en-US" sz="2400" dirty="0">
+                <a:solidFill>
+                  <a:schemeClr val="accent6">
+                    <a:lumMod val="60000"/>
+                    <a:lumOff val="40000"/>
+                  </a:schemeClr>
+                </a:solidFill>
+              </a:rPr>
+              <a:t>I have uploaded a csv file. The file contains student data.</a:t>
+            </a:r>
+          </a:p>
+          <a:p>
+            <a:r>
+              <a:rPr lang="en-US" sz="2400" dirty="0">
+                <a:solidFill>
+                  <a:schemeClr val="accent6">
+                    <a:lumMod val="60000"/>
+                    <a:lumOff val="40000"/>
+                  </a:schemeClr>
+                </a:solidFill>
+              </a:rPr>
+              <a:t>Provide student information for John, Age 20, Course AI.</a:t>
+            </a:r>
+          </a:p>
+          <a:p>
+            <a:endParaRPr lang="en-US" sz="2400" dirty="0">
+              <a:solidFill>
+                <a:schemeClr val="accent6">
+                  <a:lumMod val="60000"/>
+                  <a:lumOff val="40000"/>
+                </a:schemeClr>
+              </a:solidFill>
+            </a:endParaRPr>
+          </a:p>
+          <a:p>
+            <a:endParaRPr lang="en-US" sz="2400" dirty="0">
+              <a:solidFill>
+                <a:schemeClr val="accent6">
+                  <a:lumMod val="60000"/>
+                  <a:lumOff val="40000"/>
+                </a:schemeClr>
+              </a:solidFill>
+            </a:endParaRPr>
+          </a:p>
+          <a:p>
+            <a:r>
+              <a:rPr lang="en-US" sz="2400" dirty="0">
+                <a:solidFill>
+                  <a:schemeClr val="accent6">
+                    <a:lumMod val="60000"/>
+                    <a:lumOff val="40000"/>
+                  </a:schemeClr>
+                </a:solidFill>
+              </a:rPr>
+              <a:t>AI might respond in random format.</a:t>
+            </a:r>
+          </a:p>
+        </p:txBody>
+      </p:sp>
+    </p:spTree>
+    <p:extLst>
+      <p:ext uri="{BB962C8B-B14F-4D97-AF65-F5344CB8AC3E}">
+        <p14:creationId xmlns:p14="http://schemas.microsoft.com/office/powerpoint/2010/main" val="1196178615"/>
+      </p:ext>
+    </p:extLst>
+  </p:cSld>
+  <p:clrMapOvr>
+    <a:masterClrMapping/>
+  </p:clrMapOvr>
+</p:sld>
+</file>
+
+<file path=ppt/slides/slide15.xml><?xml version="1.0" encoding="utf-8"?>
 <p:sld xmlns:a="http://schemas.openxmlformats.org/drawingml/2006/main" xmlns:r="http://schemas.openxmlformats.org/officeDocument/2006/relationships" xmlns:p="http://schemas.openxmlformats.org/presentationml/2006/main">
   <p:cSld>
     <p:spTree>
@@ -4462,7 +4814,7 @@
 </p:sld>
 </file>
 
-<file path=ppt/slides/slide13.xml><?xml version="1.0" encoding="utf-8"?>
+<file path=ppt/slides/slide16.xml><?xml version="1.0" encoding="utf-8"?>
 <p:sld xmlns:a="http://schemas.openxmlformats.org/drawingml/2006/main" xmlns:r="http://schemas.openxmlformats.org/officeDocument/2006/relationships" xmlns:p="http://schemas.openxmlformats.org/presentationml/2006/main">
   <p:cSld>
     <p:spTree>
@@ -4807,7 +5159,7 @@
 </p:sld>
 </file>
 
-<file path=ppt/slides/slide14.xml><?xml version="1.0" encoding="utf-8"?>
+<file path=ppt/slides/slide17.xml><?xml version="1.0" encoding="utf-8"?>
 <p:sld xmlns:a="http://schemas.openxmlformats.org/drawingml/2006/main" xmlns:r="http://schemas.openxmlformats.org/officeDocument/2006/relationships" xmlns:p="http://schemas.openxmlformats.org/presentationml/2006/main">
   <p:cSld>
     <p:spTree>
@@ -4930,7 +5282,7 @@
         </p:blipFill>
         <p:spPr>
           <a:xfrm>
-            <a:off x="874775" y="3072239"/>
+            <a:off x="701039" y="2669903"/>
             <a:ext cx="9436387" cy="2975018"/>
           </a:xfrm>
           <a:prstGeom prst="rect">
@@ -4951,7 +5303,7 @@
 </p:sld>
 </file>
 
-<file path=ppt/slides/slide15.xml><?xml version="1.0" encoding="utf-8"?>
+<file path=ppt/slides/slide18.xml><?xml version="1.0" encoding="utf-8"?>
 <p:sld xmlns:a="http://schemas.openxmlformats.org/drawingml/2006/main" xmlns:r="http://schemas.openxmlformats.org/officeDocument/2006/relationships" xmlns:p="http://schemas.openxmlformats.org/presentationml/2006/main">
   <p:cSld>
     <p:spTree>
@@ -5090,6 +5442,376 @@
           </a:p>
         </p:txBody>
       </p:sp>
+      <p:sp>
+        <p:nvSpPr>
+          <p:cNvPr id="2" name="Rectangle 1">
+            <a:extLst>
+              <a:ext uri="{FF2B5EF4-FFF2-40B4-BE49-F238E27FC236}">
+                <a16:creationId xmlns:a16="http://schemas.microsoft.com/office/drawing/2014/main" id="{58A9B366-DFAB-3E79-D0E4-E8A0C95F84D9}"/>
+              </a:ext>
+            </a:extLst>
+          </p:cNvPr>
+          <p:cNvSpPr/>
+          <p:nvPr/>
+        </p:nvSpPr>
+        <p:spPr>
+          <a:xfrm>
+            <a:off x="1444752" y="4005072"/>
+            <a:ext cx="2542032" cy="1069848"/>
+          </a:xfrm>
+          <a:prstGeom prst="rect">
+            <a:avLst/>
+          </a:prstGeom>
+        </p:spPr>
+        <p:style>
+          <a:lnRef idx="2">
+            <a:schemeClr val="accent1">
+              <a:shade val="15000"/>
+            </a:schemeClr>
+          </a:lnRef>
+          <a:fillRef idx="1">
+            <a:schemeClr val="accent1"/>
+          </a:fillRef>
+          <a:effectRef idx="0">
+            <a:schemeClr val="accent1"/>
+          </a:effectRef>
+          <a:fontRef idx="minor">
+            <a:schemeClr val="lt1"/>
+          </a:fontRef>
+        </p:style>
+        <p:txBody>
+          <a:bodyPr rtlCol="0" anchor="ctr"/>
+          <a:lstStyle/>
+          <a:p>
+            <a:pPr algn="ctr"/>
+            <a:r>
+              <a:rPr lang="en-US" dirty="0"/>
+              <a:t>LLM </a:t>
+            </a:r>
+          </a:p>
+          <a:p>
+            <a:pPr algn="ctr"/>
+            <a:r>
+              <a:rPr lang="en-US" dirty="0"/>
+              <a:t>Model</a:t>
+            </a:r>
+          </a:p>
+        </p:txBody>
+      </p:sp>
+      <p:sp>
+        <p:nvSpPr>
+          <p:cNvPr id="3" name="Rectangle 2">
+            <a:extLst>
+              <a:ext uri="{FF2B5EF4-FFF2-40B4-BE49-F238E27FC236}">
+                <a16:creationId xmlns:a16="http://schemas.microsoft.com/office/drawing/2014/main" id="{25FA321B-E8DE-BD54-C0C7-B3D304AA5716}"/>
+              </a:ext>
+            </a:extLst>
+          </p:cNvPr>
+          <p:cNvSpPr/>
+          <p:nvPr/>
+        </p:nvSpPr>
+        <p:spPr>
+          <a:xfrm>
+            <a:off x="4824984" y="3916763"/>
+            <a:ext cx="2542032" cy="1466171"/>
+          </a:xfrm>
+          <a:prstGeom prst="rect">
+            <a:avLst/>
+          </a:prstGeom>
+        </p:spPr>
+        <p:style>
+          <a:lnRef idx="1">
+            <a:schemeClr val="accent2"/>
+          </a:lnRef>
+          <a:fillRef idx="2">
+            <a:schemeClr val="accent2"/>
+          </a:fillRef>
+          <a:effectRef idx="1">
+            <a:schemeClr val="accent2"/>
+          </a:effectRef>
+          <a:fontRef idx="minor">
+            <a:schemeClr val="dk1"/>
+          </a:fontRef>
+        </p:style>
+        <p:txBody>
+          <a:bodyPr rtlCol="0" anchor="ctr"/>
+          <a:lstStyle/>
+          <a:p>
+            <a:r>
+              <a:rPr lang="en-US" dirty="0"/>
+              <a:t>{</a:t>
+            </a:r>
+          </a:p>
+          <a:p>
+            <a:r>
+              <a:rPr lang="en-US" dirty="0"/>
+              <a:t>“name”: “John”,</a:t>
+            </a:r>
+          </a:p>
+          <a:p>
+            <a:r>
+              <a:rPr lang="en-US" dirty="0"/>
+              <a:t>“age”: “39”</a:t>
+            </a:r>
+          </a:p>
+          <a:p>
+            <a:r>
+              <a:rPr lang="en-US" dirty="0"/>
+              <a:t>} </a:t>
+            </a:r>
+          </a:p>
+        </p:txBody>
+      </p:sp>
+      <p:sp>
+        <p:nvSpPr>
+          <p:cNvPr id="5" name="Rectangle 4">
+            <a:extLst>
+              <a:ext uri="{FF2B5EF4-FFF2-40B4-BE49-F238E27FC236}">
+                <a16:creationId xmlns:a16="http://schemas.microsoft.com/office/drawing/2014/main" id="{AB3E13B7-CFF1-7EAB-E349-F604DDDB6DC3}"/>
+              </a:ext>
+            </a:extLst>
+          </p:cNvPr>
+          <p:cNvSpPr/>
+          <p:nvPr/>
+        </p:nvSpPr>
+        <p:spPr>
+          <a:xfrm>
+            <a:off x="8625840" y="3944195"/>
+            <a:ext cx="2542032" cy="1069848"/>
+          </a:xfrm>
+          <a:prstGeom prst="rect">
+            <a:avLst/>
+          </a:prstGeom>
+        </p:spPr>
+        <p:style>
+          <a:lnRef idx="2">
+            <a:schemeClr val="accent1">
+              <a:shade val="15000"/>
+            </a:schemeClr>
+          </a:lnRef>
+          <a:fillRef idx="1">
+            <a:schemeClr val="accent1"/>
+          </a:fillRef>
+          <a:effectRef idx="0">
+            <a:schemeClr val="accent1"/>
+          </a:effectRef>
+          <a:fontRef idx="minor">
+            <a:schemeClr val="lt1"/>
+          </a:fontRef>
+        </p:style>
+        <p:txBody>
+          <a:bodyPr rtlCol="0" anchor="ctr"/>
+          <a:lstStyle/>
+          <a:p>
+            <a:pPr algn="ctr"/>
+            <a:r>
+              <a:rPr lang="en-US" dirty="0"/>
+              <a:t>Web</a:t>
+            </a:r>
+          </a:p>
+          <a:p>
+            <a:pPr algn="ctr"/>
+            <a:r>
+              <a:rPr lang="en-US" dirty="0"/>
+              <a:t> application</a:t>
+            </a:r>
+          </a:p>
+        </p:txBody>
+      </p:sp>
+      <p:sp>
+        <p:nvSpPr>
+          <p:cNvPr id="6" name="Arrow: Right 5">
+            <a:extLst>
+              <a:ext uri="{FF2B5EF4-FFF2-40B4-BE49-F238E27FC236}">
+                <a16:creationId xmlns:a16="http://schemas.microsoft.com/office/drawing/2014/main" id="{B0572F43-DC79-7670-2AD2-6EACBECF53ED}"/>
+              </a:ext>
+            </a:extLst>
+          </p:cNvPr>
+          <p:cNvSpPr/>
+          <p:nvPr/>
+        </p:nvSpPr>
+        <p:spPr>
+          <a:xfrm>
+            <a:off x="4123944" y="4352544"/>
+            <a:ext cx="563880" cy="420624"/>
+          </a:xfrm>
+          <a:prstGeom prst="rightArrow">
+            <a:avLst/>
+          </a:prstGeom>
+        </p:spPr>
+        <p:style>
+          <a:lnRef idx="2">
+            <a:schemeClr val="accent1">
+              <a:shade val="15000"/>
+            </a:schemeClr>
+          </a:lnRef>
+          <a:fillRef idx="1">
+            <a:schemeClr val="accent1"/>
+          </a:fillRef>
+          <a:effectRef idx="0">
+            <a:schemeClr val="accent1"/>
+          </a:effectRef>
+          <a:fontRef idx="minor">
+            <a:schemeClr val="lt1"/>
+          </a:fontRef>
+        </p:style>
+        <p:txBody>
+          <a:bodyPr rtlCol="0" anchor="ctr"/>
+          <a:lstStyle/>
+          <a:p>
+            <a:pPr algn="ctr"/>
+            <a:endParaRPr lang="en-US"/>
+          </a:p>
+        </p:txBody>
+      </p:sp>
+      <p:sp>
+        <p:nvSpPr>
+          <p:cNvPr id="7" name="Arrow: Right 6">
+            <a:extLst>
+              <a:ext uri="{FF2B5EF4-FFF2-40B4-BE49-F238E27FC236}">
+                <a16:creationId xmlns:a16="http://schemas.microsoft.com/office/drawing/2014/main" id="{AF0E61A3-6413-98D2-8538-B4D70315119D}"/>
+              </a:ext>
+            </a:extLst>
+          </p:cNvPr>
+          <p:cNvSpPr/>
+          <p:nvPr/>
+        </p:nvSpPr>
+        <p:spPr>
+          <a:xfrm>
+            <a:off x="7714488" y="4229224"/>
+            <a:ext cx="563880" cy="420624"/>
+          </a:xfrm>
+          <a:prstGeom prst="rightArrow">
+            <a:avLst/>
+          </a:prstGeom>
+        </p:spPr>
+        <p:style>
+          <a:lnRef idx="2">
+            <a:schemeClr val="accent1">
+              <a:shade val="15000"/>
+            </a:schemeClr>
+          </a:lnRef>
+          <a:fillRef idx="1">
+            <a:schemeClr val="accent1"/>
+          </a:fillRef>
+          <a:effectRef idx="0">
+            <a:schemeClr val="accent1"/>
+          </a:effectRef>
+          <a:fontRef idx="minor">
+            <a:schemeClr val="lt1"/>
+          </a:fontRef>
+        </p:style>
+        <p:txBody>
+          <a:bodyPr rtlCol="0" anchor="ctr"/>
+          <a:lstStyle/>
+          <a:p>
+            <a:pPr algn="ctr"/>
+            <a:endParaRPr lang="en-US"/>
+          </a:p>
+        </p:txBody>
+      </p:sp>
+      <p:sp>
+        <p:nvSpPr>
+          <p:cNvPr id="8" name="Rectangle 7">
+            <a:extLst>
+              <a:ext uri="{FF2B5EF4-FFF2-40B4-BE49-F238E27FC236}">
+                <a16:creationId xmlns:a16="http://schemas.microsoft.com/office/drawing/2014/main" id="{B95D1AA4-61ED-632C-868D-AF1C39072598}"/>
+              </a:ext>
+            </a:extLst>
+          </p:cNvPr>
+          <p:cNvSpPr/>
+          <p:nvPr/>
+        </p:nvSpPr>
+        <p:spPr>
+          <a:xfrm>
+            <a:off x="8833104" y="5482076"/>
+            <a:ext cx="2542032" cy="1069848"/>
+          </a:xfrm>
+          <a:prstGeom prst="rect">
+            <a:avLst/>
+          </a:prstGeom>
+        </p:spPr>
+        <p:style>
+          <a:lnRef idx="2">
+            <a:schemeClr val="accent1">
+              <a:shade val="15000"/>
+            </a:schemeClr>
+          </a:lnRef>
+          <a:fillRef idx="1">
+            <a:schemeClr val="accent1"/>
+          </a:fillRef>
+          <a:effectRef idx="0">
+            <a:schemeClr val="accent1"/>
+          </a:effectRef>
+          <a:fontRef idx="minor">
+            <a:schemeClr val="lt1"/>
+          </a:fontRef>
+        </p:style>
+        <p:txBody>
+          <a:bodyPr rtlCol="0" anchor="ctr"/>
+          <a:lstStyle/>
+          <a:p>
+            <a:pPr algn="ctr"/>
+            <a:r>
+              <a:rPr lang="en-US" dirty="0"/>
+              <a:t>ML</a:t>
+            </a:r>
+          </a:p>
+          <a:p>
+            <a:pPr algn="ctr"/>
+            <a:r>
+              <a:rPr lang="en-US" dirty="0"/>
+              <a:t>Model</a:t>
+            </a:r>
+          </a:p>
+        </p:txBody>
+      </p:sp>
+      <p:sp>
+        <p:nvSpPr>
+          <p:cNvPr id="9" name="Arrow: Right 8">
+            <a:extLst>
+              <a:ext uri="{FF2B5EF4-FFF2-40B4-BE49-F238E27FC236}">
+                <a16:creationId xmlns:a16="http://schemas.microsoft.com/office/drawing/2014/main" id="{F4F92DAA-6A76-8162-0901-9E17AD72D072}"/>
+              </a:ext>
+            </a:extLst>
+          </p:cNvPr>
+          <p:cNvSpPr/>
+          <p:nvPr/>
+        </p:nvSpPr>
+        <p:spPr>
+          <a:xfrm rot="1847438">
+            <a:off x="7689067" y="5364080"/>
+            <a:ext cx="924561" cy="420624"/>
+          </a:xfrm>
+          <a:prstGeom prst="rightArrow">
+            <a:avLst/>
+          </a:prstGeom>
+        </p:spPr>
+        <p:style>
+          <a:lnRef idx="2">
+            <a:schemeClr val="accent1">
+              <a:shade val="15000"/>
+            </a:schemeClr>
+          </a:lnRef>
+          <a:fillRef idx="1">
+            <a:schemeClr val="accent1"/>
+          </a:fillRef>
+          <a:effectRef idx="0">
+            <a:schemeClr val="accent1"/>
+          </a:effectRef>
+          <a:fontRef idx="minor">
+            <a:schemeClr val="lt1"/>
+          </a:fontRef>
+        </p:style>
+        <p:txBody>
+          <a:bodyPr rtlCol="0" anchor="ctr"/>
+          <a:lstStyle/>
+          <a:p>
+            <a:pPr algn="ctr"/>
+            <a:endParaRPr lang="en-US"/>
+          </a:p>
+        </p:txBody>
+      </p:sp>
     </p:spTree>
     <p:extLst>
       <p:ext uri="{BB962C8B-B14F-4D97-AF65-F5344CB8AC3E}">
@@ -5103,7 +5825,7 @@
 </p:sld>
 </file>
 
-<file path=ppt/slides/slide16.xml><?xml version="1.0" encoding="utf-8"?>
+<file path=ppt/slides/slide19.xml><?xml version="1.0" encoding="utf-8"?>
 <p:sld xmlns:a="http://schemas.openxmlformats.org/drawingml/2006/main" xmlns:r="http://schemas.openxmlformats.org/officeDocument/2006/relationships" xmlns:p="http://schemas.openxmlformats.org/presentationml/2006/main">
   <p:cSld>
     <p:spTree>
@@ -5141,7 +5863,7 @@
         <p:spPr>
           <a:xfrm>
             <a:off x="594360" y="632914"/>
-            <a:ext cx="10780776" cy="3046988"/>
+            <a:ext cx="5586984" cy="2677656"/>
           </a:xfrm>
           <a:prstGeom prst="rect">
             <a:avLst/>
@@ -5255,23 +5977,6 @@
                 </a:solidFill>
               </a:rPr>
               <a:t>Developing AI applications</a:t>
-            </a:r>
-          </a:p>
-          <a:p>
-            <a:pPr marL="342900" lvl="0" indent="-342900">
-              <a:buFont typeface="Arial" panose="020B0604020202020204" pitchFamily="34" charset="0"/>
-              <a:buChar char="•"/>
-            </a:pPr>
-            <a:r>
-              <a:rPr lang="en-US" sz="2400" dirty="0">
-                <a:solidFill>
-                  <a:schemeClr val="accent6">
-                    <a:lumMod val="60000"/>
-                    <a:lumOff val="40000"/>
-                  </a:schemeClr>
-                </a:solidFill>
-              </a:rPr>
-              <a:t>Generating code</a:t>
             </a:r>
           </a:p>
         </p:txBody>
@@ -5289,7 +5994,231 @@
 </p:sld>
 </file>
 
-<file path=ppt/slides/slide17.xml><?xml version="1.0" encoding="utf-8"?>
+<file path=ppt/slides/slide2.xml><?xml version="1.0" encoding="utf-8"?>
+<p:sld xmlns:a="http://schemas.openxmlformats.org/drawingml/2006/main" xmlns:r="http://schemas.openxmlformats.org/officeDocument/2006/relationships" xmlns:p="http://schemas.openxmlformats.org/presentationml/2006/main">
+  <p:cSld>
+    <p:spTree>
+      <p:nvGrpSpPr>
+        <p:cNvPr id="1" name="">
+          <a:extLst>
+            <a:ext uri="{FF2B5EF4-FFF2-40B4-BE49-F238E27FC236}">
+              <a16:creationId xmlns:a16="http://schemas.microsoft.com/office/drawing/2014/main" id="{C0DC4EE4-7CB9-DC2F-6583-CEFEBED4EA2E}"/>
+            </a:ext>
+          </a:extLst>
+        </p:cNvPr>
+        <p:cNvGrpSpPr/>
+        <p:nvPr/>
+      </p:nvGrpSpPr>
+      <p:grpSpPr>
+        <a:xfrm>
+          <a:off x="0" y="0"/>
+          <a:ext cx="0" cy="0"/>
+          <a:chOff x="0" y="0"/>
+          <a:chExt cx="0" cy="0"/>
+        </a:xfrm>
+      </p:grpSpPr>
+      <p:sp>
+        <p:nvSpPr>
+          <p:cNvPr id="4" name="TextBox 3">
+            <a:extLst>
+              <a:ext uri="{FF2B5EF4-FFF2-40B4-BE49-F238E27FC236}">
+                <a16:creationId xmlns:a16="http://schemas.microsoft.com/office/drawing/2014/main" id="{34D9E2B6-28AD-DF63-1020-0A3F17443414}"/>
+              </a:ext>
+            </a:extLst>
+          </p:cNvPr>
+          <p:cNvSpPr txBox="1"/>
+          <p:nvPr/>
+        </p:nvSpPr>
+        <p:spPr>
+          <a:xfrm>
+            <a:off x="594360" y="962098"/>
+            <a:ext cx="10780776" cy="3785652"/>
+          </a:xfrm>
+          <a:prstGeom prst="rect">
+            <a:avLst/>
+          </a:prstGeom>
+          <a:noFill/>
+        </p:spPr>
+        <p:txBody>
+          <a:bodyPr wrap="square">
+            <a:spAutoFit/>
+          </a:bodyPr>
+          <a:lstStyle/>
+          <a:p>
+            <a:pPr marL="457200" indent="-457200">
+              <a:buAutoNum type="arabicPeriod"/>
+            </a:pPr>
+            <a:r>
+              <a:rPr lang="en-US" sz="2400" b="1" dirty="0">
+                <a:solidFill>
+                  <a:schemeClr val="accent6">
+                    <a:lumMod val="60000"/>
+                    <a:lumOff val="40000"/>
+                  </a:schemeClr>
+                </a:solidFill>
+              </a:rPr>
+              <a:t>Delimiters – Separating Data Clearly</a:t>
+            </a:r>
+          </a:p>
+          <a:p>
+            <a:pPr marL="457200" indent="-457200">
+              <a:buAutoNum type="arabicPeriod"/>
+            </a:pPr>
+            <a:endParaRPr lang="en-US" sz="2400" dirty="0">
+              <a:solidFill>
+                <a:schemeClr val="accent6">
+                  <a:lumMod val="60000"/>
+                  <a:lumOff val="40000"/>
+                </a:schemeClr>
+              </a:solidFill>
+            </a:endParaRPr>
+          </a:p>
+          <a:p>
+            <a:r>
+              <a:rPr lang="en-US" sz="2400" b="1" dirty="0">
+                <a:solidFill>
+                  <a:schemeClr val="accent6">
+                    <a:lumMod val="60000"/>
+                    <a:lumOff val="40000"/>
+                  </a:schemeClr>
+                </a:solidFill>
+              </a:rPr>
+              <a:t>What are Delimiters?</a:t>
+            </a:r>
+            <a:endParaRPr lang="en-US" sz="2400" dirty="0">
+              <a:solidFill>
+                <a:schemeClr val="accent6">
+                  <a:lumMod val="60000"/>
+                  <a:lumOff val="40000"/>
+                </a:schemeClr>
+              </a:solidFill>
+            </a:endParaRPr>
+          </a:p>
+          <a:p>
+            <a:r>
+              <a:rPr lang="en-US" sz="2400" dirty="0">
+                <a:solidFill>
+                  <a:schemeClr val="accent6">
+                    <a:lumMod val="60000"/>
+                    <a:lumOff val="40000"/>
+                  </a:schemeClr>
+                </a:solidFill>
+              </a:rPr>
+              <a:t>Delimiters are </a:t>
+            </a:r>
+            <a:r>
+              <a:rPr lang="en-US" sz="2400" b="1" dirty="0">
+                <a:solidFill>
+                  <a:schemeClr val="accent6">
+                    <a:lumMod val="60000"/>
+                    <a:lumOff val="40000"/>
+                  </a:schemeClr>
+                </a:solidFill>
+              </a:rPr>
+              <a:t>special symbols or characters used to separate different parts of a prompt</a:t>
+            </a:r>
+            <a:r>
+              <a:rPr lang="en-US" sz="2400" dirty="0">
+                <a:solidFill>
+                  <a:schemeClr val="accent6">
+                    <a:lumMod val="60000"/>
+                    <a:lumOff val="40000"/>
+                  </a:schemeClr>
+                </a:solidFill>
+              </a:rPr>
+              <a:t>. They help AI clearly distinguish between instructions, data, and examples.</a:t>
+            </a:r>
+          </a:p>
+          <a:p>
+            <a:endParaRPr lang="en-US" sz="2400" dirty="0">
+              <a:solidFill>
+                <a:schemeClr val="accent6">
+                  <a:lumMod val="60000"/>
+                  <a:lumOff val="40000"/>
+                </a:schemeClr>
+              </a:solidFill>
+            </a:endParaRPr>
+          </a:p>
+          <a:p>
+            <a:r>
+              <a:rPr lang="en-US" sz="2400" dirty="0">
+                <a:solidFill>
+                  <a:schemeClr val="accent6">
+                    <a:lumMod val="60000"/>
+                    <a:lumOff val="40000"/>
+                  </a:schemeClr>
+                </a:solidFill>
+              </a:rPr>
+              <a:t>Common delimiters include:</a:t>
+            </a:r>
+          </a:p>
+          <a:p>
+            <a:pPr marL="342900" lvl="0" indent="-342900">
+              <a:buFont typeface="Arial" panose="020B0604020202020204" pitchFamily="34" charset="0"/>
+              <a:buChar char="•"/>
+            </a:pPr>
+            <a:r>
+              <a:rPr lang="en-US" sz="2400" dirty="0">
+                <a:solidFill>
+                  <a:schemeClr val="accent6">
+                    <a:lumMod val="60000"/>
+                    <a:lumOff val="40000"/>
+                  </a:schemeClr>
+                </a:solidFill>
+              </a:rPr>
+              <a:t>Triple quotes (""")</a:t>
+            </a:r>
+          </a:p>
+          <a:p>
+            <a:pPr marL="342900" lvl="0" indent="-342900">
+              <a:buFont typeface="Arial" panose="020B0604020202020204" pitchFamily="34" charset="0"/>
+              <a:buChar char="•"/>
+            </a:pPr>
+            <a:r>
+              <a:rPr lang="en-US" sz="2400" dirty="0">
+                <a:solidFill>
+                  <a:schemeClr val="accent6">
+                    <a:lumMod val="60000"/>
+                    <a:lumOff val="40000"/>
+                  </a:schemeClr>
+                </a:solidFill>
+              </a:rPr>
+              <a:t>&lt;&lt;&lt;   &gt;&gt;&gt;</a:t>
+            </a:r>
+          </a:p>
+          <a:p>
+            <a:pPr marL="342900" lvl="0" indent="-342900">
+              <a:buFont typeface="Arial" panose="020B0604020202020204" pitchFamily="34" charset="0"/>
+              <a:buChar char="•"/>
+            </a:pPr>
+            <a:r>
+              <a:rPr lang="en-US" sz="2400" dirty="0">
+                <a:solidFill>
+                  <a:schemeClr val="accent6">
+                    <a:lumMod val="60000"/>
+                    <a:lumOff val="40000"/>
+                  </a:schemeClr>
+                </a:solidFill>
+              </a:rPr>
+              <a:t>XML or JSON tags</a:t>
+            </a:r>
+          </a:p>
+        </p:txBody>
+      </p:sp>
+    </p:spTree>
+    <p:extLst>
+      <p:ext uri="{BB962C8B-B14F-4D97-AF65-F5344CB8AC3E}">
+        <p14:creationId xmlns:p14="http://schemas.microsoft.com/office/powerpoint/2010/main" val="3227882609"/>
+      </p:ext>
+    </p:extLst>
+  </p:cSld>
+  <p:clrMapOvr>
+    <a:masterClrMapping/>
+  </p:clrMapOvr>
+</p:sld>
+</file>
+
+<file path=ppt/slides/slide20.xml><?xml version="1.0" encoding="utf-8"?>
 <p:sld xmlns:a="http://schemas.openxmlformats.org/drawingml/2006/main" xmlns:r="http://schemas.openxmlformats.org/officeDocument/2006/relationships" xmlns:p="http://schemas.openxmlformats.org/presentationml/2006/main">
   <p:cSld>
     <p:spTree>
@@ -5601,7 +6530,217 @@
 </p:sld>
 </file>
 
-<file path=ppt/slides/slide18.xml><?xml version="1.0" encoding="utf-8"?>
+<file path=ppt/slides/slide21.xml><?xml version="1.0" encoding="utf-8"?>
+<p:sld xmlns:a="http://schemas.openxmlformats.org/drawingml/2006/main" xmlns:r="http://schemas.openxmlformats.org/officeDocument/2006/relationships" xmlns:p="http://schemas.openxmlformats.org/presentationml/2006/main">
+  <p:cSld>
+    <p:spTree>
+      <p:nvGrpSpPr>
+        <p:cNvPr id="1" name="">
+          <a:extLst>
+            <a:ext uri="{FF2B5EF4-FFF2-40B4-BE49-F238E27FC236}">
+              <a16:creationId xmlns:a16="http://schemas.microsoft.com/office/drawing/2014/main" id="{5042E48D-0637-E0ED-B3EF-F0B4713A52B4}"/>
+            </a:ext>
+          </a:extLst>
+        </p:cNvPr>
+        <p:cNvGrpSpPr/>
+        <p:nvPr/>
+      </p:nvGrpSpPr>
+      <p:grpSpPr>
+        <a:xfrm>
+          <a:off x="0" y="0"/>
+          <a:ext cx="0" cy="0"/>
+          <a:chOff x="0" y="0"/>
+          <a:chExt cx="0" cy="0"/>
+        </a:xfrm>
+      </p:grpSpPr>
+      <p:sp>
+        <p:nvSpPr>
+          <p:cNvPr id="4" name="TextBox 3">
+            <a:extLst>
+              <a:ext uri="{FF2B5EF4-FFF2-40B4-BE49-F238E27FC236}">
+                <a16:creationId xmlns:a16="http://schemas.microsoft.com/office/drawing/2014/main" id="{7F2A61DA-9EDF-40A4-9CE4-E81E5546B511}"/>
+              </a:ext>
+            </a:extLst>
+          </p:cNvPr>
+          <p:cNvSpPr txBox="1"/>
+          <p:nvPr/>
+        </p:nvSpPr>
+        <p:spPr>
+          <a:xfrm>
+            <a:off x="594360" y="248866"/>
+            <a:ext cx="10780776" cy="461665"/>
+          </a:xfrm>
+          <a:prstGeom prst="rect">
+            <a:avLst/>
+          </a:prstGeom>
+          <a:noFill/>
+        </p:spPr>
+        <p:txBody>
+          <a:bodyPr wrap="square">
+            <a:spAutoFit/>
+          </a:bodyPr>
+          <a:lstStyle/>
+          <a:p>
+            <a:r>
+              <a:rPr lang="en-US" sz="2400" b="1" dirty="0">
+                <a:solidFill>
+                  <a:schemeClr val="accent6">
+                    <a:lumMod val="60000"/>
+                    <a:lumOff val="40000"/>
+                  </a:schemeClr>
+                </a:solidFill>
+              </a:rPr>
+              <a:t>Combining above Techniques</a:t>
+            </a:r>
+            <a:endParaRPr lang="en-US" sz="2400" dirty="0">
+              <a:solidFill>
+                <a:schemeClr val="accent6">
+                  <a:lumMod val="60000"/>
+                  <a:lumOff val="40000"/>
+                </a:schemeClr>
+              </a:solidFill>
+            </a:endParaRPr>
+          </a:p>
+        </p:txBody>
+      </p:sp>
+      <p:pic>
+        <p:nvPicPr>
+          <p:cNvPr id="3" name="Picture 2">
+            <a:extLst>
+              <a:ext uri="{FF2B5EF4-FFF2-40B4-BE49-F238E27FC236}">
+                <a16:creationId xmlns:a16="http://schemas.microsoft.com/office/drawing/2014/main" id="{4C01E50D-7CD7-35FC-20EC-3E91E1EF9E67}"/>
+              </a:ext>
+            </a:extLst>
+          </p:cNvPr>
+          <p:cNvPicPr>
+            <a:picLocks noChangeAspect="1"/>
+          </p:cNvPicPr>
+          <p:nvPr/>
+        </p:nvPicPr>
+        <p:blipFill>
+          <a:blip r:embed="rId2"/>
+          <a:stretch>
+            <a:fillRect/>
+          </a:stretch>
+        </p:blipFill>
+        <p:spPr>
+          <a:xfrm>
+            <a:off x="594360" y="646523"/>
+            <a:ext cx="9328080" cy="2718469"/>
+          </a:xfrm>
+          <a:prstGeom prst="rect">
+            <a:avLst/>
+          </a:prstGeom>
+        </p:spPr>
+      </p:pic>
+      <p:sp>
+        <p:nvSpPr>
+          <p:cNvPr id="6" name="TextBox 5">
+            <a:extLst>
+              <a:ext uri="{FF2B5EF4-FFF2-40B4-BE49-F238E27FC236}">
+                <a16:creationId xmlns:a16="http://schemas.microsoft.com/office/drawing/2014/main" id="{31869E82-5DF1-2CD6-4B82-2317F091A3D4}"/>
+              </a:ext>
+            </a:extLst>
+          </p:cNvPr>
+          <p:cNvSpPr txBox="1"/>
+          <p:nvPr/>
+        </p:nvSpPr>
+        <p:spPr>
+          <a:xfrm>
+            <a:off x="301752" y="3574393"/>
+            <a:ext cx="10671048" cy="2862322"/>
+          </a:xfrm>
+          <a:prstGeom prst="rect">
+            <a:avLst/>
+          </a:prstGeom>
+          <a:noFill/>
+        </p:spPr>
+        <p:txBody>
+          <a:bodyPr wrap="square">
+            <a:spAutoFit/>
+          </a:bodyPr>
+          <a:lstStyle/>
+          <a:p>
+            <a:r>
+              <a:rPr lang="en-US" dirty="0">
+                <a:solidFill>
+                  <a:schemeClr val="accent6">
+                    <a:lumMod val="60000"/>
+                    <a:lumOff val="40000"/>
+                  </a:schemeClr>
+                </a:solidFill>
+              </a:rPr>
+              <a:t>{</a:t>
+            </a:r>
+          </a:p>
+          <a:p>
+            <a:r>
+              <a:rPr lang="en-US" dirty="0">
+                <a:solidFill>
+                  <a:schemeClr val="accent6">
+                    <a:lumMod val="60000"/>
+                    <a:lumOff val="40000"/>
+                  </a:schemeClr>
+                </a:solidFill>
+              </a:rPr>
+              <a:t>  "Trend": "Sales show an initial increase followed by a gradual decline, indicating weakening momentum after January.",</a:t>
+            </a:r>
+          </a:p>
+          <a:p>
+            <a:r>
+              <a:rPr lang="en-US" dirty="0">
+                <a:solidFill>
+                  <a:schemeClr val="accent6">
+                    <a:lumMod val="60000"/>
+                    <a:lumOff val="40000"/>
+                  </a:schemeClr>
+                </a:solidFill>
+              </a:rPr>
+              <a:t>  "Insight": "Although January experienced strong growth (+15%), the subsequent months show consecutive declines (-3% in February and -1% in March), suggesting that the initial boost was not sustained and demand may be stabilizing or weakening.",</a:t>
+            </a:r>
+          </a:p>
+          <a:p>
+            <a:r>
+              <a:rPr lang="en-US" dirty="0">
+                <a:solidFill>
+                  <a:schemeClr val="accent6">
+                    <a:lumMod val="60000"/>
+                    <a:lumOff val="40000"/>
+                  </a:schemeClr>
+                </a:solidFill>
+              </a:rPr>
+              <a:t>  "Recommendation": "Investigate the drivers behind January's spike and assess why performance declined afterward. Focus on strengthening customer retention strategies, optimizing marketing campaigns, and identifying seasonal or operational factors affecting February and March performance."</a:t>
+            </a:r>
+          </a:p>
+          <a:p>
+            <a:r>
+              <a:rPr lang="en-US" dirty="0">
+                <a:solidFill>
+                  <a:schemeClr val="accent6">
+                    <a:lumMod val="60000"/>
+                    <a:lumOff val="40000"/>
+                  </a:schemeClr>
+                </a:solidFill>
+              </a:rPr>
+              <a:t>}</a:t>
+            </a:r>
+          </a:p>
+        </p:txBody>
+      </p:sp>
+    </p:spTree>
+    <p:extLst>
+      <p:ext uri="{BB962C8B-B14F-4D97-AF65-F5344CB8AC3E}">
+        <p14:creationId xmlns:p14="http://schemas.microsoft.com/office/powerpoint/2010/main" val="3929211359"/>
+      </p:ext>
+    </p:extLst>
+  </p:cSld>
+  <p:clrMapOvr>
+    <a:masterClrMapping/>
+  </p:clrMapOvr>
+</p:sld>
+</file>
+
+<file path=ppt/slides/slide22.xml><?xml version="1.0" encoding="utf-8"?>
 <p:sld xmlns:a="http://schemas.openxmlformats.org/drawingml/2006/main" xmlns:r="http://schemas.openxmlformats.org/officeDocument/2006/relationships" xmlns:p="http://schemas.openxmlformats.org/presentationml/2006/main">
   <p:cSld>
     <p:spTree>
@@ -5637,230 +6776,6 @@
 </p:sld>
 </file>
 
-<file path=ppt/slides/slide2.xml><?xml version="1.0" encoding="utf-8"?>
-<p:sld xmlns:a="http://schemas.openxmlformats.org/drawingml/2006/main" xmlns:r="http://schemas.openxmlformats.org/officeDocument/2006/relationships" xmlns:p="http://schemas.openxmlformats.org/presentationml/2006/main">
-  <p:cSld>
-    <p:spTree>
-      <p:nvGrpSpPr>
-        <p:cNvPr id="1" name="">
-          <a:extLst>
-            <a:ext uri="{FF2B5EF4-FFF2-40B4-BE49-F238E27FC236}">
-              <a16:creationId xmlns:a16="http://schemas.microsoft.com/office/drawing/2014/main" id="{C0DC4EE4-7CB9-DC2F-6583-CEFEBED4EA2E}"/>
-            </a:ext>
-          </a:extLst>
-        </p:cNvPr>
-        <p:cNvGrpSpPr/>
-        <p:nvPr/>
-      </p:nvGrpSpPr>
-      <p:grpSpPr>
-        <a:xfrm>
-          <a:off x="0" y="0"/>
-          <a:ext cx="0" cy="0"/>
-          <a:chOff x="0" y="0"/>
-          <a:chExt cx="0" cy="0"/>
-        </a:xfrm>
-      </p:grpSpPr>
-      <p:sp>
-        <p:nvSpPr>
-          <p:cNvPr id="4" name="TextBox 3">
-            <a:extLst>
-              <a:ext uri="{FF2B5EF4-FFF2-40B4-BE49-F238E27FC236}">
-                <a16:creationId xmlns:a16="http://schemas.microsoft.com/office/drawing/2014/main" id="{34D9E2B6-28AD-DF63-1020-0A3F17443414}"/>
-              </a:ext>
-            </a:extLst>
-          </p:cNvPr>
-          <p:cNvSpPr txBox="1"/>
-          <p:nvPr/>
-        </p:nvSpPr>
-        <p:spPr>
-          <a:xfrm>
-            <a:off x="594360" y="962098"/>
-            <a:ext cx="10780776" cy="3785652"/>
-          </a:xfrm>
-          <a:prstGeom prst="rect">
-            <a:avLst/>
-          </a:prstGeom>
-          <a:noFill/>
-        </p:spPr>
-        <p:txBody>
-          <a:bodyPr wrap="square">
-            <a:spAutoFit/>
-          </a:bodyPr>
-          <a:lstStyle/>
-          <a:p>
-            <a:pPr marL="457200" indent="-457200">
-              <a:buAutoNum type="arabicPeriod"/>
-            </a:pPr>
-            <a:r>
-              <a:rPr lang="en-US" sz="2400" b="1" dirty="0">
-                <a:solidFill>
-                  <a:schemeClr val="accent6">
-                    <a:lumMod val="60000"/>
-                    <a:lumOff val="40000"/>
-                  </a:schemeClr>
-                </a:solidFill>
-              </a:rPr>
-              <a:t>Delimiters – Separating Data Clearly</a:t>
-            </a:r>
-          </a:p>
-          <a:p>
-            <a:pPr marL="457200" indent="-457200">
-              <a:buAutoNum type="arabicPeriod"/>
-            </a:pPr>
-            <a:endParaRPr lang="en-US" sz="2400" dirty="0">
-              <a:solidFill>
-                <a:schemeClr val="accent6">
-                  <a:lumMod val="60000"/>
-                  <a:lumOff val="40000"/>
-                </a:schemeClr>
-              </a:solidFill>
-            </a:endParaRPr>
-          </a:p>
-          <a:p>
-            <a:r>
-              <a:rPr lang="en-US" sz="2400" b="1" dirty="0">
-                <a:solidFill>
-                  <a:schemeClr val="accent6">
-                    <a:lumMod val="60000"/>
-                    <a:lumOff val="40000"/>
-                  </a:schemeClr>
-                </a:solidFill>
-              </a:rPr>
-              <a:t>What are Delimiters?</a:t>
-            </a:r>
-            <a:endParaRPr lang="en-US" sz="2400" dirty="0">
-              <a:solidFill>
-                <a:schemeClr val="accent6">
-                  <a:lumMod val="60000"/>
-                  <a:lumOff val="40000"/>
-                </a:schemeClr>
-              </a:solidFill>
-            </a:endParaRPr>
-          </a:p>
-          <a:p>
-            <a:r>
-              <a:rPr lang="en-US" sz="2400" dirty="0">
-                <a:solidFill>
-                  <a:schemeClr val="accent6">
-                    <a:lumMod val="60000"/>
-                    <a:lumOff val="40000"/>
-                  </a:schemeClr>
-                </a:solidFill>
-              </a:rPr>
-              <a:t>Delimiters are </a:t>
-            </a:r>
-            <a:r>
-              <a:rPr lang="en-US" sz="2400" b="1" dirty="0">
-                <a:solidFill>
-                  <a:schemeClr val="accent6">
-                    <a:lumMod val="60000"/>
-                    <a:lumOff val="40000"/>
-                  </a:schemeClr>
-                </a:solidFill>
-              </a:rPr>
-              <a:t>special symbols or characters used to separate different parts of a prompt</a:t>
-            </a:r>
-            <a:r>
-              <a:rPr lang="en-US" sz="2400" dirty="0">
-                <a:solidFill>
-                  <a:schemeClr val="accent6">
-                    <a:lumMod val="60000"/>
-                    <a:lumOff val="40000"/>
-                  </a:schemeClr>
-                </a:solidFill>
-              </a:rPr>
-              <a:t>. They help AI clearly distinguish between instructions, data, and examples.</a:t>
-            </a:r>
-          </a:p>
-          <a:p>
-            <a:endParaRPr lang="en-US" sz="2400" dirty="0">
-              <a:solidFill>
-                <a:schemeClr val="accent6">
-                  <a:lumMod val="60000"/>
-                  <a:lumOff val="40000"/>
-                </a:schemeClr>
-              </a:solidFill>
-            </a:endParaRPr>
-          </a:p>
-          <a:p>
-            <a:r>
-              <a:rPr lang="en-US" sz="2400" dirty="0">
-                <a:solidFill>
-                  <a:schemeClr val="accent6">
-                    <a:lumMod val="60000"/>
-                    <a:lumOff val="40000"/>
-                  </a:schemeClr>
-                </a:solidFill>
-              </a:rPr>
-              <a:t>Common delimiters include:</a:t>
-            </a:r>
-          </a:p>
-          <a:p>
-            <a:pPr marL="342900" lvl="0" indent="-342900">
-              <a:buFont typeface="Arial" panose="020B0604020202020204" pitchFamily="34" charset="0"/>
-              <a:buChar char="•"/>
-            </a:pPr>
-            <a:r>
-              <a:rPr lang="en-US" sz="2400" dirty="0">
-                <a:solidFill>
-                  <a:schemeClr val="accent6">
-                    <a:lumMod val="60000"/>
-                    <a:lumOff val="40000"/>
-                  </a:schemeClr>
-                </a:solidFill>
-              </a:rPr>
-              <a:t>Triple quotes (""")</a:t>
-            </a:r>
-          </a:p>
-          <a:p>
-            <a:pPr marL="342900" lvl="0" indent="-342900">
-              <a:buFont typeface="Arial" panose="020B0604020202020204" pitchFamily="34" charset="0"/>
-              <a:buChar char="•"/>
-            </a:pPr>
-            <a:r>
-              <a:rPr lang="en-US" sz="2400" dirty="0">
-                <a:solidFill>
-                  <a:schemeClr val="accent6">
-                    <a:lumMod val="60000"/>
-                    <a:lumOff val="40000"/>
-                  </a:schemeClr>
-                </a:solidFill>
-              </a:rPr>
-              <a:t>&lt;&lt;&lt;   &gt;&gt;&gt;</a:t>
-            </a:r>
-          </a:p>
-          <a:p>
-            <a:pPr marL="342900" lvl="0" indent="-342900">
-              <a:buFont typeface="Arial" panose="020B0604020202020204" pitchFamily="34" charset="0"/>
-              <a:buChar char="•"/>
-            </a:pPr>
-            <a:r>
-              <a:rPr lang="en-US" sz="2400" dirty="0">
-                <a:solidFill>
-                  <a:schemeClr val="accent6">
-                    <a:lumMod val="60000"/>
-                    <a:lumOff val="40000"/>
-                  </a:schemeClr>
-                </a:solidFill>
-              </a:rPr>
-              <a:t>XML or JSON tags</a:t>
-            </a:r>
-          </a:p>
-        </p:txBody>
-      </p:sp>
-    </p:spTree>
-    <p:extLst>
-      <p:ext uri="{BB962C8B-B14F-4D97-AF65-F5344CB8AC3E}">
-        <p14:creationId xmlns:p14="http://schemas.microsoft.com/office/powerpoint/2010/main" val="3227882609"/>
-      </p:ext>
-    </p:extLst>
-  </p:cSld>
-  <p:clrMapOvr>
-    <a:masterClrMapping/>
-  </p:clrMapOvr>
-</p:sld>
-</file>
-
 <file path=ppt/slides/slide3.xml><?xml version="1.0" encoding="utf-8"?>
 <p:sld xmlns:a="http://schemas.openxmlformats.org/drawingml/2006/main" xmlns:r="http://schemas.openxmlformats.org/officeDocument/2006/relationships" xmlns:p="http://schemas.openxmlformats.org/presentationml/2006/main">
   <p:cSld>
@@ -5899,7 +6814,7 @@
         <p:spPr>
           <a:xfrm>
             <a:off x="594360" y="962098"/>
-            <a:ext cx="10780776" cy="3046988"/>
+            <a:ext cx="10780776" cy="3416320"/>
           </a:xfrm>
           <a:prstGeom prst="rect">
             <a:avLst/>
@@ -5957,7 +6872,7 @@
                   </a:schemeClr>
                 </a:solidFill>
               </a:rPr>
-              <a:t>Summarize the following text Explain how climate change affects agriculture Climate change is causing unpredictable rainfall and crop damage.</a:t>
+              <a:t>Summarize the following text: Explain how climate change affects agriculture. Climate change is causing unpredictable rainfall and crop damage. Species are disappearing because of climate change.</a:t>
             </a:r>
           </a:p>
           <a:p>
@@ -6057,7 +6972,7 @@
         <p:spPr>
           <a:xfrm>
             <a:off x="594360" y="962098"/>
-            <a:ext cx="10780776" cy="4524315"/>
+            <a:ext cx="10780776" cy="5262979"/>
           </a:xfrm>
           <a:prstGeom prst="rect">
             <a:avLst/>
@@ -6175,7 +7090,20 @@
                   </a:schemeClr>
                 </a:solidFill>
               </a:rPr>
-              <a:t>Climate change is causing unpredictable rainfall and crop damage.</a:t>
+              <a:t>Explain how climate change affects agriculture.</a:t>
+            </a:r>
+          </a:p>
+          <a:p>
+            <a:r>
+              <a:rPr lang="en-US" sz="2400" dirty="0">
+                <a:solidFill>
+                  <a:schemeClr val="accent6">
+                    <a:lumMod val="60000"/>
+                    <a:lumOff val="40000"/>
+                  </a:schemeClr>
+                </a:solidFill>
+              </a:rPr>
+              <a:t>Climate change is causing unpredictable rainfall and crop damage. Species are disappearing because of climate change. </a:t>
             </a:r>
           </a:p>
           <a:p>
@@ -6276,7 +7204,7 @@
         </p:nvSpPr>
         <p:spPr>
           <a:xfrm>
-            <a:off x="594360" y="962098"/>
+            <a:off x="557784" y="943810"/>
             <a:ext cx="10780776" cy="4524315"/>
           </a:xfrm>
           <a:prstGeom prst="rect">
@@ -6335,7 +7263,29 @@
                   </a:schemeClr>
                 </a:solidFill>
               </a:rPr>
-              <a:t>Summarize the text inside triple quotes.</a:t>
+              <a:t>Summarize the text inside </a:t>
+            </a:r>
+            <a:r>
+              <a:rPr lang="en-US" sz="2400" b="1" dirty="0">
+                <a:solidFill>
+                  <a:schemeClr val="accent6">
+                    <a:lumMod val="60000"/>
+                    <a:lumOff val="40000"/>
+                  </a:schemeClr>
+                </a:solidFill>
+              </a:rPr>
+              <a:t>triple</a:t>
+            </a:r>
+            <a:r>
+              <a:rPr lang="en-US" sz="2400" dirty="0">
+                <a:solidFill>
+                  <a:schemeClr val="accent6">
+                    <a:lumMod val="60000"/>
+                    <a:lumOff val="40000"/>
+                  </a:schemeClr>
+                </a:solidFill>
+              </a:rPr>
+              <a:t> quotes.</a:t>
             </a:r>
           </a:p>
           <a:p>
@@ -6361,7 +7311,7 @@
                   </a:schemeClr>
                 </a:solidFill>
               </a:rPr>
-              <a:t>"""</a:t>
+              <a:t>“””</a:t>
             </a:r>
           </a:p>
           <a:p>
@@ -6387,7 +7337,7 @@
                   </a:schemeClr>
                 </a:solidFill>
               </a:rPr>
-              <a:t>""“</a:t>
+              <a:t>“””</a:t>
             </a:r>
           </a:p>
           <a:p>
@@ -6410,7 +7360,29 @@
                   </a:schemeClr>
                 </a:solidFill>
               </a:rPr>
-              <a:t>Here triple quotes separates instructions from text</a:t>
+              <a:t>Here </a:t>
+            </a:r>
+            <a:r>
+              <a:rPr lang="en-US" sz="2400" b="1" dirty="0">
+                <a:solidFill>
+                  <a:schemeClr val="accent6">
+                    <a:lumMod val="60000"/>
+                    <a:lumOff val="40000"/>
+                  </a:schemeClr>
+                </a:solidFill>
+              </a:rPr>
+              <a:t>triple</a:t>
+            </a:r>
+            <a:r>
+              <a:rPr lang="en-US" sz="2400" dirty="0">
+                <a:solidFill>
+                  <a:schemeClr val="accent6">
+                    <a:lumMod val="60000"/>
+                    <a:lumOff val="40000"/>
+                  </a:schemeClr>
+                </a:solidFill>
+              </a:rPr>
+              <a:t> quotes separates instructions from text</a:t>
             </a:r>
           </a:p>
         </p:txBody>
@@ -6542,7 +7514,7 @@
           </a:p>
           <a:p>
             <a:r>
-              <a:rPr lang="en-US" sz="2400" dirty="0">
+              <a:rPr lang="en-US" sz="2400" b="1" dirty="0">
                 <a:solidFill>
                   <a:schemeClr val="accent6">
                     <a:lumMod val="60000"/>
@@ -6594,7 +7566,7 @@
           </a:p>
           <a:p>
             <a:r>
-              <a:rPr lang="en-US" sz="2400" dirty="0">
+              <a:rPr lang="en-US" sz="2400" b="1" dirty="0">
                 <a:solidFill>
                   <a:schemeClr val="accent6">
                     <a:lumMod val="60000"/>
@@ -6677,8 +7649,8 @@
         </p:nvSpPr>
         <p:spPr>
           <a:xfrm>
-            <a:off x="594360" y="962098"/>
-            <a:ext cx="10780776" cy="5262979"/>
+            <a:off x="310896" y="376882"/>
+            <a:ext cx="4361688" cy="5262979"/>
           </a:xfrm>
           <a:prstGeom prst="rect">
             <a:avLst/>
@@ -6895,6 +7867,430 @@
 </file>
 
 <file path=ppt/slides/slide8.xml><?xml version="1.0" encoding="utf-8"?>
+<p:sld xmlns:a="http://schemas.openxmlformats.org/drawingml/2006/main" xmlns:r="http://schemas.openxmlformats.org/officeDocument/2006/relationships" xmlns:p="http://schemas.openxmlformats.org/presentationml/2006/main">
+  <p:cSld>
+    <p:spTree>
+      <p:nvGrpSpPr>
+        <p:cNvPr id="1" name="">
+          <a:extLst>
+            <a:ext uri="{FF2B5EF4-FFF2-40B4-BE49-F238E27FC236}">
+              <a16:creationId xmlns:a16="http://schemas.microsoft.com/office/drawing/2014/main" id="{F2F4C8C4-D588-AEB5-D1C5-12184DDA4EC3}"/>
+            </a:ext>
+          </a:extLst>
+        </p:cNvPr>
+        <p:cNvGrpSpPr/>
+        <p:nvPr/>
+      </p:nvGrpSpPr>
+      <p:grpSpPr>
+        <a:xfrm>
+          <a:off x="0" y="0"/>
+          <a:ext cx="0" cy="0"/>
+          <a:chOff x="0" y="0"/>
+          <a:chExt cx="0" cy="0"/>
+        </a:xfrm>
+      </p:grpSpPr>
+      <p:sp>
+        <p:nvSpPr>
+          <p:cNvPr id="2" name="TextBox 1">
+            <a:extLst>
+              <a:ext uri="{FF2B5EF4-FFF2-40B4-BE49-F238E27FC236}">
+                <a16:creationId xmlns:a16="http://schemas.microsoft.com/office/drawing/2014/main" id="{B13D8008-7E4E-CD3B-D366-C0E345658CC0}"/>
+              </a:ext>
+            </a:extLst>
+          </p:cNvPr>
+          <p:cNvSpPr txBox="1"/>
+          <p:nvPr/>
+        </p:nvSpPr>
+        <p:spPr>
+          <a:xfrm>
+            <a:off x="438912" y="227530"/>
+            <a:ext cx="4114800" cy="6370975"/>
+          </a:xfrm>
+          <a:prstGeom prst="rect">
+            <a:avLst/>
+          </a:prstGeom>
+          <a:noFill/>
+        </p:spPr>
+        <p:txBody>
+          <a:bodyPr wrap="square">
+            <a:spAutoFit/>
+          </a:bodyPr>
+          <a:lstStyle/>
+          <a:p>
+            <a:r>
+              <a:rPr lang="en-US" sz="2400" b="1" dirty="0">
+                <a:solidFill>
+                  <a:schemeClr val="accent6">
+                    <a:lumMod val="60000"/>
+                    <a:lumOff val="40000"/>
+                  </a:schemeClr>
+                </a:solidFill>
+              </a:rPr>
+              <a:t>Using tags</a:t>
+            </a:r>
+          </a:p>
+          <a:p>
+            <a:endParaRPr lang="en-US" sz="2400" dirty="0">
+              <a:solidFill>
+                <a:schemeClr val="accent6">
+                  <a:lumMod val="60000"/>
+                  <a:lumOff val="40000"/>
+                </a:schemeClr>
+              </a:solidFill>
+            </a:endParaRPr>
+          </a:p>
+          <a:p>
+            <a:r>
+              <a:rPr lang="en-US" sz="2400" dirty="0">
+                <a:solidFill>
+                  <a:schemeClr val="accent6">
+                    <a:lumMod val="60000"/>
+                    <a:lumOff val="40000"/>
+                  </a:schemeClr>
+                </a:solidFill>
+              </a:rPr>
+              <a:t>Prompt:</a:t>
+            </a:r>
+          </a:p>
+          <a:p>
+            <a:r>
+              <a:rPr lang="en-US" sz="2400" dirty="0">
+                <a:solidFill>
+                  <a:schemeClr val="accent6">
+                    <a:lumMod val="60000"/>
+                    <a:lumOff val="40000"/>
+                  </a:schemeClr>
+                </a:solidFill>
+              </a:rPr>
+              <a:t>Classify the sentiment of the text inside the &lt;review&gt; tags as Positive, Negative, or Neutral. </a:t>
+            </a:r>
+          </a:p>
+          <a:p>
+            <a:endParaRPr lang="en-US" sz="2400" dirty="0">
+              <a:solidFill>
+                <a:schemeClr val="accent6">
+                  <a:lumMod val="60000"/>
+                  <a:lumOff val="40000"/>
+                </a:schemeClr>
+              </a:solidFill>
+            </a:endParaRPr>
+          </a:p>
+          <a:p>
+            <a:r>
+              <a:rPr lang="en-US" sz="2400" dirty="0">
+                <a:solidFill>
+                  <a:schemeClr val="accent6">
+                    <a:lumMod val="60000"/>
+                    <a:lumOff val="40000"/>
+                  </a:schemeClr>
+                </a:solidFill>
+              </a:rPr>
+              <a:t>&lt;review&gt; </a:t>
+            </a:r>
+          </a:p>
+          <a:p>
+            <a:r>
+              <a:rPr lang="en-US" sz="2400" dirty="0">
+                <a:solidFill>
+                  <a:schemeClr val="accent6">
+                    <a:lumMod val="60000"/>
+                    <a:lumOff val="40000"/>
+                  </a:schemeClr>
+                </a:solidFill>
+              </a:rPr>
+              <a:t>I hated the customer service, but the product itself works perfectly. I am conflicted. &lt;/review&gt;</a:t>
+            </a:r>
+          </a:p>
+          <a:p>
+            <a:endParaRPr lang="en-US" sz="2400" dirty="0">
+              <a:solidFill>
+                <a:schemeClr val="accent6">
+                  <a:lumMod val="60000"/>
+                  <a:lumOff val="40000"/>
+                </a:schemeClr>
+              </a:solidFill>
+            </a:endParaRPr>
+          </a:p>
+          <a:p>
+            <a:r>
+              <a:rPr lang="en-US" sz="2400" dirty="0">
+                <a:solidFill>
+                  <a:schemeClr val="accent6">
+                    <a:lumMod val="60000"/>
+                    <a:lumOff val="40000"/>
+                  </a:schemeClr>
+                </a:solidFill>
+              </a:rPr>
+              <a:t>&lt;output&gt;</a:t>
+            </a:r>
+          </a:p>
+          <a:p>
+            <a:r>
+              <a:rPr lang="en-US" sz="2400" dirty="0">
+                <a:solidFill>
+                  <a:schemeClr val="accent6">
+                    <a:lumMod val="60000"/>
+                    <a:lumOff val="40000"/>
+                  </a:schemeClr>
+                </a:solidFill>
+              </a:rPr>
+              <a:t>Neutral</a:t>
+            </a:r>
+          </a:p>
+          <a:p>
+            <a:r>
+              <a:rPr lang="en-US" sz="2400" dirty="0">
+                <a:solidFill>
+                  <a:schemeClr val="accent6">
+                    <a:lumMod val="60000"/>
+                    <a:lumOff val="40000"/>
+                  </a:schemeClr>
+                </a:solidFill>
+              </a:rPr>
+              <a:t>&lt;/output&gt;</a:t>
+            </a:r>
+          </a:p>
+          <a:p>
+            <a:endParaRPr lang="en-US" sz="2400" dirty="0">
+              <a:solidFill>
+                <a:schemeClr val="accent6">
+                  <a:lumMod val="60000"/>
+                  <a:lumOff val="40000"/>
+                </a:schemeClr>
+              </a:solidFill>
+            </a:endParaRPr>
+          </a:p>
+        </p:txBody>
+      </p:sp>
+      <p:sp>
+        <p:nvSpPr>
+          <p:cNvPr id="5" name="TextBox 4">
+            <a:extLst>
+              <a:ext uri="{FF2B5EF4-FFF2-40B4-BE49-F238E27FC236}">
+                <a16:creationId xmlns:a16="http://schemas.microsoft.com/office/drawing/2014/main" id="{C2855EA6-E343-58EA-F03B-D3980CDF69D4}"/>
+              </a:ext>
+            </a:extLst>
+          </p:cNvPr>
+          <p:cNvSpPr txBox="1"/>
+          <p:nvPr/>
+        </p:nvSpPr>
+        <p:spPr>
+          <a:xfrm>
+            <a:off x="5682996" y="510046"/>
+            <a:ext cx="6190488" cy="5632311"/>
+          </a:xfrm>
+          <a:prstGeom prst="rect">
+            <a:avLst/>
+          </a:prstGeom>
+          <a:noFill/>
+        </p:spPr>
+        <p:txBody>
+          <a:bodyPr wrap="square">
+            <a:spAutoFit/>
+          </a:bodyPr>
+          <a:lstStyle/>
+          <a:p>
+            <a:r>
+              <a:rPr lang="en-US" sz="2400" dirty="0">
+                <a:solidFill>
+                  <a:schemeClr val="accent6">
+                    <a:lumMod val="60000"/>
+                    <a:lumOff val="40000"/>
+                  </a:schemeClr>
+                </a:solidFill>
+              </a:rPr>
+              <a:t>&lt;review&gt; </a:t>
+            </a:r>
+          </a:p>
+          <a:p>
+            <a:r>
+              <a:rPr lang="en-US" sz="2400" dirty="0">
+                <a:solidFill>
+                  <a:schemeClr val="accent6">
+                    <a:lumMod val="60000"/>
+                    <a:lumOff val="40000"/>
+                  </a:schemeClr>
+                </a:solidFill>
+              </a:rPr>
+              <a:t>I hated the customer service</a:t>
+            </a:r>
+          </a:p>
+          <a:p>
+            <a:r>
+              <a:rPr lang="en-US" sz="2400" dirty="0">
+                <a:solidFill>
+                  <a:schemeClr val="accent6">
+                    <a:lumMod val="60000"/>
+                    <a:lumOff val="40000"/>
+                  </a:schemeClr>
+                </a:solidFill>
+              </a:rPr>
+              <a:t>&lt;/review&gt;</a:t>
+            </a:r>
+          </a:p>
+          <a:p>
+            <a:endParaRPr lang="en-US" sz="2400" dirty="0">
+              <a:solidFill>
+                <a:schemeClr val="accent6">
+                  <a:lumMod val="60000"/>
+                  <a:lumOff val="40000"/>
+                </a:schemeClr>
+              </a:solidFill>
+            </a:endParaRPr>
+          </a:p>
+          <a:p>
+            <a:r>
+              <a:rPr lang="en-US" sz="2400" dirty="0">
+                <a:solidFill>
+                  <a:schemeClr val="accent6">
+                    <a:lumMod val="60000"/>
+                    <a:lumOff val="40000"/>
+                  </a:schemeClr>
+                </a:solidFill>
+              </a:rPr>
+              <a:t>&lt;output&gt;</a:t>
+            </a:r>
+          </a:p>
+          <a:p>
+            <a:r>
+              <a:rPr lang="en-US" sz="2400" dirty="0">
+                <a:solidFill>
+                  <a:schemeClr val="accent6">
+                    <a:lumMod val="60000"/>
+                    <a:lumOff val="40000"/>
+                  </a:schemeClr>
+                </a:solidFill>
+              </a:rPr>
+              <a:t>Negative</a:t>
+            </a:r>
+          </a:p>
+          <a:p>
+            <a:r>
+              <a:rPr lang="en-US" sz="2400" dirty="0">
+                <a:solidFill>
+                  <a:schemeClr val="accent6">
+                    <a:lumMod val="60000"/>
+                    <a:lumOff val="40000"/>
+                  </a:schemeClr>
+                </a:solidFill>
+              </a:rPr>
+              <a:t>&lt;/output&gt;</a:t>
+            </a:r>
+          </a:p>
+          <a:p>
+            <a:endParaRPr lang="en-US" sz="2400" dirty="0">
+              <a:solidFill>
+                <a:schemeClr val="accent6">
+                  <a:lumMod val="60000"/>
+                  <a:lumOff val="40000"/>
+                </a:schemeClr>
+              </a:solidFill>
+            </a:endParaRPr>
+          </a:p>
+          <a:p>
+            <a:r>
+              <a:rPr lang="en-US" sz="2400" dirty="0">
+                <a:solidFill>
+                  <a:schemeClr val="accent6">
+                    <a:lumMod val="60000"/>
+                    <a:lumOff val="40000"/>
+                  </a:schemeClr>
+                </a:solidFill>
+              </a:rPr>
+              <a:t>&lt;review&gt; </a:t>
+            </a:r>
+          </a:p>
+          <a:p>
+            <a:r>
+              <a:rPr lang="en-US" sz="2400" dirty="0">
+                <a:solidFill>
+                  <a:schemeClr val="accent6">
+                    <a:lumMod val="60000"/>
+                    <a:lumOff val="40000"/>
+                  </a:schemeClr>
+                </a:solidFill>
+              </a:rPr>
+              <a:t>I loved the product</a:t>
+            </a:r>
+          </a:p>
+          <a:p>
+            <a:r>
+              <a:rPr lang="en-US" sz="2400" dirty="0">
+                <a:solidFill>
+                  <a:schemeClr val="accent6">
+                    <a:lumMod val="60000"/>
+                    <a:lumOff val="40000"/>
+                  </a:schemeClr>
+                </a:solidFill>
+              </a:rPr>
+              <a:t>&lt;/review&gt;</a:t>
+            </a:r>
+          </a:p>
+          <a:p>
+            <a:endParaRPr lang="en-US" sz="2400" dirty="0">
+              <a:solidFill>
+                <a:schemeClr val="accent6">
+                  <a:lumMod val="60000"/>
+                  <a:lumOff val="40000"/>
+                </a:schemeClr>
+              </a:solidFill>
+            </a:endParaRPr>
+          </a:p>
+          <a:p>
+            <a:r>
+              <a:rPr lang="en-US" sz="2400" dirty="0">
+                <a:solidFill>
+                  <a:schemeClr val="accent6">
+                    <a:lumMod val="60000"/>
+                    <a:lumOff val="40000"/>
+                  </a:schemeClr>
+                </a:solidFill>
+              </a:rPr>
+              <a:t>&lt;output&gt;</a:t>
+            </a:r>
+          </a:p>
+          <a:p>
+            <a:r>
+              <a:rPr lang="en-US" sz="2400" dirty="0">
+                <a:solidFill>
+                  <a:schemeClr val="accent6">
+                    <a:lumMod val="60000"/>
+                    <a:lumOff val="40000"/>
+                  </a:schemeClr>
+                </a:solidFill>
+              </a:rPr>
+              <a:t>Positive</a:t>
+            </a:r>
+          </a:p>
+          <a:p>
+            <a:r>
+              <a:rPr lang="en-US" sz="2400" dirty="0">
+                <a:solidFill>
+                  <a:schemeClr val="accent6">
+                    <a:lumMod val="60000"/>
+                    <a:lumOff val="40000"/>
+                  </a:schemeClr>
+                </a:solidFill>
+              </a:rPr>
+              <a:t>&lt;/output&gt;</a:t>
+            </a:r>
+          </a:p>
+        </p:txBody>
+      </p:sp>
+    </p:spTree>
+    <p:extLst>
+      <p:ext uri="{BB962C8B-B14F-4D97-AF65-F5344CB8AC3E}">
+        <p14:creationId xmlns:p14="http://schemas.microsoft.com/office/powerpoint/2010/main" val="1655330475"/>
+      </p:ext>
+    </p:extLst>
+  </p:cSld>
+  <p:clrMapOvr>
+    <a:masterClrMapping/>
+  </p:clrMapOvr>
+</p:sld>
+</file>
+
+<file path=ppt/slides/slide9.xml><?xml version="1.0" encoding="utf-8"?>
 <p:sld xmlns:a="http://schemas.openxmlformats.org/drawingml/2006/main" xmlns:r="http://schemas.openxmlformats.org/officeDocument/2006/relationships" xmlns:p="http://schemas.openxmlformats.org/presentationml/2006/main">
   <p:cSld>
     <p:spTree>
@@ -7053,192 +8449,6 @@
     <p:extLst>
       <p:ext uri="{BB962C8B-B14F-4D97-AF65-F5344CB8AC3E}">
         <p14:creationId xmlns:p14="http://schemas.microsoft.com/office/powerpoint/2010/main" val="313390747"/>
-      </p:ext>
-    </p:extLst>
-  </p:cSld>
-  <p:clrMapOvr>
-    <a:masterClrMapping/>
-  </p:clrMapOvr>
-</p:sld>
-</file>
-
-<file path=ppt/slides/slide9.xml><?xml version="1.0" encoding="utf-8"?>
-<p:sld xmlns:a="http://schemas.openxmlformats.org/drawingml/2006/main" xmlns:r="http://schemas.openxmlformats.org/officeDocument/2006/relationships" xmlns:p="http://schemas.openxmlformats.org/presentationml/2006/main">
-  <p:cSld>
-    <p:spTree>
-      <p:nvGrpSpPr>
-        <p:cNvPr id="1" name="">
-          <a:extLst>
-            <a:ext uri="{FF2B5EF4-FFF2-40B4-BE49-F238E27FC236}">
-              <a16:creationId xmlns:a16="http://schemas.microsoft.com/office/drawing/2014/main" id="{199E7710-6E70-9107-DA21-E5E4D4F9619B}"/>
-            </a:ext>
-          </a:extLst>
-        </p:cNvPr>
-        <p:cNvGrpSpPr/>
-        <p:nvPr/>
-      </p:nvGrpSpPr>
-      <p:grpSpPr>
-        <a:xfrm>
-          <a:off x="0" y="0"/>
-          <a:ext cx="0" cy="0"/>
-          <a:chOff x="0" y="0"/>
-          <a:chExt cx="0" cy="0"/>
-        </a:xfrm>
-      </p:grpSpPr>
-      <p:sp>
-        <p:nvSpPr>
-          <p:cNvPr id="4" name="TextBox 3">
-            <a:extLst>
-              <a:ext uri="{FF2B5EF4-FFF2-40B4-BE49-F238E27FC236}">
-                <a16:creationId xmlns:a16="http://schemas.microsoft.com/office/drawing/2014/main" id="{1FBABCEC-4C9F-CF95-52DD-87B0C24484D3}"/>
-              </a:ext>
-            </a:extLst>
-          </p:cNvPr>
-          <p:cNvSpPr txBox="1"/>
-          <p:nvPr/>
-        </p:nvSpPr>
-        <p:spPr>
-          <a:xfrm>
-            <a:off x="594360" y="962098"/>
-            <a:ext cx="10780776" cy="3046988"/>
-          </a:xfrm>
-          <a:prstGeom prst="rect">
-            <a:avLst/>
-          </a:prstGeom>
-          <a:noFill/>
-        </p:spPr>
-        <p:txBody>
-          <a:bodyPr wrap="square">
-            <a:spAutoFit/>
-          </a:bodyPr>
-          <a:lstStyle/>
-          <a:p>
-            <a:r>
-              <a:rPr lang="en-US" sz="2400" b="1" dirty="0">
-                <a:solidFill>
-                  <a:schemeClr val="accent6">
-                    <a:lumMod val="60000"/>
-                    <a:lumOff val="40000"/>
-                  </a:schemeClr>
-                </a:solidFill>
-              </a:rPr>
-              <a:t>When to Use Delimiters</a:t>
-            </a:r>
-          </a:p>
-          <a:p>
-            <a:endParaRPr lang="en-US" sz="2400" dirty="0">
-              <a:solidFill>
-                <a:schemeClr val="accent6">
-                  <a:lumMod val="60000"/>
-                  <a:lumOff val="40000"/>
-                </a:schemeClr>
-              </a:solidFill>
-            </a:endParaRPr>
-          </a:p>
-          <a:p>
-            <a:r>
-              <a:rPr lang="en-US" sz="2400" dirty="0">
-                <a:solidFill>
-                  <a:schemeClr val="accent6">
-                    <a:lumMod val="60000"/>
-                    <a:lumOff val="40000"/>
-                  </a:schemeClr>
-                </a:solidFill>
-              </a:rPr>
-              <a:t>Delimiters are especially useful when:</a:t>
-            </a:r>
-          </a:p>
-          <a:p>
-            <a:pPr marL="342900" lvl="0" indent="-342900">
-              <a:buFont typeface="Arial" panose="020B0604020202020204" pitchFamily="34" charset="0"/>
-              <a:buChar char="•"/>
-            </a:pPr>
-            <a:r>
-              <a:rPr lang="en-US" sz="2400" dirty="0">
-                <a:solidFill>
-                  <a:schemeClr val="accent6">
-                    <a:lumMod val="60000"/>
-                    <a:lumOff val="40000"/>
-                  </a:schemeClr>
-                </a:solidFill>
-              </a:rPr>
-              <a:t>Working with long text inputs</a:t>
-            </a:r>
-          </a:p>
-          <a:p>
-            <a:pPr marL="342900" lvl="0" indent="-342900">
-              <a:buFont typeface="Arial" panose="020B0604020202020204" pitchFamily="34" charset="0"/>
-              <a:buChar char="•"/>
-            </a:pPr>
-            <a:r>
-              <a:rPr lang="en-US" sz="2400" dirty="0">
-                <a:solidFill>
-                  <a:schemeClr val="accent6">
-                    <a:lumMod val="60000"/>
-                    <a:lumOff val="40000"/>
-                  </a:schemeClr>
-                </a:solidFill>
-              </a:rPr>
-              <a:t>Handling structured data</a:t>
-            </a:r>
-          </a:p>
-          <a:p>
-            <a:pPr marL="342900" lvl="0" indent="-342900">
-              <a:buFont typeface="Arial" panose="020B0604020202020204" pitchFamily="34" charset="0"/>
-              <a:buChar char="•"/>
-            </a:pPr>
-            <a:r>
-              <a:rPr lang="en-US" sz="2400" dirty="0">
-                <a:solidFill>
-                  <a:schemeClr val="accent6">
-                    <a:lumMod val="60000"/>
-                    <a:lumOff val="40000"/>
-                  </a:schemeClr>
-                </a:solidFill>
-              </a:rPr>
-              <a:t>Passing code snippets</a:t>
-            </a:r>
-          </a:p>
-          <a:p>
-            <a:pPr marL="342900" lvl="0" indent="-342900">
-              <a:buFont typeface="Arial" panose="020B0604020202020204" pitchFamily="34" charset="0"/>
-              <a:buChar char="•"/>
-            </a:pPr>
-            <a:r>
-              <a:rPr lang="en-US" sz="2400" dirty="0">
-                <a:solidFill>
-                  <a:schemeClr val="accent6">
-                    <a:lumMod val="60000"/>
-                    <a:lumOff val="40000"/>
-                  </a:schemeClr>
-                </a:solidFill>
-              </a:rPr>
-              <a:t>Providing multiple examples</a:t>
-            </a:r>
-          </a:p>
-          <a:p>
-            <a:pPr marL="342900" lvl="0" indent="-342900">
-              <a:buFont typeface="Arial" panose="020B0604020202020204" pitchFamily="34" charset="0"/>
-              <a:buChar char="•"/>
-            </a:pPr>
-            <a:r>
-              <a:rPr lang="en-US" sz="2400" dirty="0">
-                <a:solidFill>
-                  <a:schemeClr val="accent6">
-                    <a:lumMod val="60000"/>
-                    <a:lumOff val="40000"/>
-                  </a:schemeClr>
-                </a:solidFill>
-              </a:rPr>
-              <a:t>Preventing instruction mixing</a:t>
-            </a:r>
-          </a:p>
-        </p:txBody>
-      </p:sp>
-    </p:spTree>
-    <p:extLst>
-      <p:ext uri="{BB962C8B-B14F-4D97-AF65-F5344CB8AC3E}">
-        <p14:creationId xmlns:p14="http://schemas.microsoft.com/office/powerpoint/2010/main" val="2196425292"/>
       </p:ext>
     </p:extLst>
   </p:cSld>
